--- a/cloudflare-deploy/public/library/teacher/teacher-kr.pptx
+++ b/cloudflare-deploy/public/library/teacher/teacher-kr.pptx
@@ -38,6 +38,7 @@
     <p:sldId id="286" r:id="rId37"/>
     <p:sldId id="287" r:id="rId38"/>
     <p:sldId id="288" r:id="rId39"/>
+    <p:sldId id="289" r:id="rId40"/>
   </p:sldIdLst>
   <p:sldSz cx="12191695" cy="6858000" type="screen4x3"/>
   <p:notesSz cx="6858000" cy="9144000"/>
@@ -22233,6 +22234,1048 @@
 </file>
 
 <file path=ppt/slides/slide28.xml><?xml version="1.0" encoding="utf-8"?>
+<p:sld xmlns:a="http://schemas.openxmlformats.org/drawingml/2006/main" xmlns:p="http://schemas.openxmlformats.org/presentationml/2006/main" xmlns:r="http://schemas.openxmlformats.org/officeDocument/2006/relationships">
+  <p:cSld>
+    <p:bg>
+      <p:bgPr>
+        <a:solidFill>
+          <a:srgbClr val="FFFFFF"/>
+        </a:solidFill>
+        <a:effectLst/>
+      </p:bgPr>
+    </p:bg>
+    <p:spTree>
+      <p:nvGrpSpPr>
+        <p:cNvPr id="1" name=""/>
+        <p:cNvGrpSpPr/>
+        <p:nvPr/>
+      </p:nvGrpSpPr>
+      <p:grpSpPr/>
+      <p:sp>
+        <p:nvSpPr>
+          <p:cNvPr id="2" name="Rectangle 1"/>
+          <p:cNvSpPr/>
+          <p:nvPr/>
+        </p:nvSpPr>
+        <p:spPr>
+          <a:xfrm>
+            <a:off x="0" y="0"/>
+            <a:ext cx="12191695" cy="566928"/>
+          </a:xfrm>
+          <a:prstGeom prst="rect">
+            <a:avLst/>
+          </a:prstGeom>
+          <a:solidFill>
+            <a:srgbClr val="EA580C"/>
+          </a:solidFill>
+          <a:ln>
+            <a:noFill/>
+          </a:ln>
+          <a:effectLst/>
+        </p:spPr>
+        <p:style>
+          <a:lnRef idx="1">
+            <a:schemeClr val="accent1"/>
+          </a:lnRef>
+          <a:fillRef idx="3">
+            <a:schemeClr val="accent1"/>
+          </a:fillRef>
+          <a:effectRef idx="2">
+            <a:schemeClr val="accent1"/>
+          </a:effectRef>
+          <a:fontRef idx="minor">
+            <a:schemeClr val="lt1"/>
+          </a:fontRef>
+        </p:style>
+        <p:txBody>
+          <a:bodyPr rtlCol="0" anchor="ctr"/>
+          <a:lstStyle/>
+          <a:p>
+            <a:pPr algn="ctr"/>
+          </a:p>
+        </p:txBody>
+      </p:sp>
+      <p:sp>
+        <p:nvSpPr>
+          <p:cNvPr id="3" name="Rectangle 2"/>
+          <p:cNvSpPr/>
+          <p:nvPr/>
+        </p:nvSpPr>
+        <p:spPr>
+          <a:xfrm>
+            <a:off x="0" y="566928"/>
+            <a:ext cx="12191695" cy="54864"/>
+          </a:xfrm>
+          <a:prstGeom prst="rect">
+            <a:avLst/>
+          </a:prstGeom>
+          <a:solidFill>
+            <a:srgbClr val="FFB020"/>
+          </a:solidFill>
+          <a:ln>
+            <a:noFill/>
+          </a:ln>
+          <a:effectLst/>
+        </p:spPr>
+        <p:style>
+          <a:lnRef idx="1">
+            <a:schemeClr val="accent1"/>
+          </a:lnRef>
+          <a:fillRef idx="3">
+            <a:schemeClr val="accent1"/>
+          </a:fillRef>
+          <a:effectRef idx="2">
+            <a:schemeClr val="accent1"/>
+          </a:effectRef>
+          <a:fontRef idx="minor">
+            <a:schemeClr val="lt1"/>
+          </a:fontRef>
+        </p:style>
+        <p:txBody>
+          <a:bodyPr rtlCol="0" anchor="ctr"/>
+          <a:lstStyle/>
+          <a:p>
+            <a:pPr algn="ctr"/>
+          </a:p>
+        </p:txBody>
+      </p:sp>
+      <p:sp>
+        <p:nvSpPr>
+          <p:cNvPr id="4" name="TextBox 3"/>
+          <p:cNvSpPr txBox="1"/>
+          <p:nvPr/>
+        </p:nvSpPr>
+        <p:spPr>
+          <a:xfrm>
+            <a:off x="365760" y="27432"/>
+            <a:ext cx="7315200" cy="502920"/>
+          </a:xfrm>
+          <a:prstGeom prst="rect">
+            <a:avLst/>
+          </a:prstGeom>
+          <a:noFill/>
+        </p:spPr>
+        <p:txBody>
+          <a:bodyPr wrap="square" anchor="ctr">
+            <a:spAutoFit/>
+          </a:bodyPr>
+          <a:lstStyle/>
+          <a:p>
+            <a:pPr algn="l">
+              <a:lnSpc>
+                <a:spcPct val="100000"/>
+              </a:lnSpc>
+            </a:pPr>
+            <a:r>
+              <a:rPr sz="1500" b="1">
+                <a:solidFill>
+                  <a:srgbClr val="FFFFFF"/>
+                </a:solidFill>
+                <a:latin typeface="Malgun Gothic"/>
+              </a:rPr>
+              <a:t>👩‍🏫 망고아이 교사용 사용설명서</a:t>
+            </a:r>
+          </a:p>
+        </p:txBody>
+      </p:sp>
+      <p:sp>
+        <p:nvSpPr>
+          <p:cNvPr id="5" name="TextBox 4"/>
+          <p:cNvSpPr txBox="1"/>
+          <p:nvPr/>
+        </p:nvSpPr>
+        <p:spPr>
+          <a:xfrm>
+            <a:off x="8168335" y="27432"/>
+            <a:ext cx="3657600" cy="502920"/>
+          </a:xfrm>
+          <a:prstGeom prst="rect">
+            <a:avLst/>
+          </a:prstGeom>
+          <a:noFill/>
+        </p:spPr>
+        <p:txBody>
+          <a:bodyPr wrap="square" anchor="ctr">
+            <a:spAutoFit/>
+          </a:bodyPr>
+          <a:lstStyle/>
+          <a:p>
+            <a:pPr algn="r">
+              <a:lnSpc>
+                <a:spcPct val="100000"/>
+              </a:lnSpc>
+            </a:pPr>
+            <a:r>
+              <a:rPr sz="1300" b="1">
+                <a:solidFill>
+                  <a:srgbClr val="F1F5F9"/>
+                </a:solidFill>
+                <a:latin typeface="Malgun Gothic"/>
+              </a:rPr>
+              <a:t>주요 기능 사용법</a:t>
+            </a:r>
+          </a:p>
+        </p:txBody>
+      </p:sp>
+      <p:sp>
+        <p:nvSpPr>
+          <p:cNvPr id="6" name="Rounded Rectangle 5"/>
+          <p:cNvSpPr/>
+          <p:nvPr/>
+        </p:nvSpPr>
+        <p:spPr>
+          <a:xfrm>
+            <a:off x="365760" y="822960"/>
+            <a:ext cx="868680" cy="868680"/>
+          </a:xfrm>
+          <a:prstGeom prst="roundRect">
+            <a:avLst/>
+          </a:prstGeom>
+          <a:solidFill>
+            <a:srgbClr val="EA580C"/>
+          </a:solidFill>
+          <a:ln>
+            <a:noFill/>
+          </a:ln>
+          <a:effectLst/>
+        </p:spPr>
+        <p:style>
+          <a:lnRef idx="1">
+            <a:schemeClr val="accent1"/>
+          </a:lnRef>
+          <a:fillRef idx="3">
+            <a:schemeClr val="accent1"/>
+          </a:fillRef>
+          <a:effectRef idx="2">
+            <a:schemeClr val="accent1"/>
+          </a:effectRef>
+          <a:fontRef idx="minor">
+            <a:schemeClr val="lt1"/>
+          </a:fontRef>
+        </p:style>
+        <p:txBody>
+          <a:bodyPr rtlCol="0" anchor="ctr"/>
+          <a:lstStyle/>
+          <a:p>
+            <a:pPr algn="ctr"/>
+          </a:p>
+        </p:txBody>
+      </p:sp>
+      <p:sp>
+        <p:nvSpPr>
+          <p:cNvPr id="7" name="TextBox 6"/>
+          <p:cNvSpPr txBox="1"/>
+          <p:nvPr/>
+        </p:nvSpPr>
+        <p:spPr>
+          <a:xfrm>
+            <a:off x="365760" y="822960"/>
+            <a:ext cx="868680" cy="868680"/>
+          </a:xfrm>
+          <a:prstGeom prst="rect">
+            <a:avLst/>
+          </a:prstGeom>
+          <a:noFill/>
+        </p:spPr>
+        <p:txBody>
+          <a:bodyPr wrap="square" anchor="ctr">
+            <a:spAutoFit/>
+          </a:bodyPr>
+          <a:lstStyle/>
+          <a:p>
+            <a:pPr algn="ctr">
+              <a:lnSpc>
+                <a:spcPct val="100000"/>
+              </a:lnSpc>
+            </a:pPr>
+            <a:r>
+              <a:rPr sz="2600" b="1">
+                <a:solidFill>
+                  <a:srgbClr val="FFFFFF"/>
+                </a:solidFill>
+                <a:latin typeface="Malgun Gothic"/>
+              </a:rPr>
+              <a:t>26</a:t>
+            </a:r>
+          </a:p>
+        </p:txBody>
+      </p:sp>
+      <p:sp>
+        <p:nvSpPr>
+          <p:cNvPr id="8" name="TextBox 7"/>
+          <p:cNvSpPr txBox="1"/>
+          <p:nvPr/>
+        </p:nvSpPr>
+        <p:spPr>
+          <a:xfrm>
+            <a:off x="1371600" y="822960"/>
+            <a:ext cx="10424160" cy="502920"/>
+          </a:xfrm>
+          <a:prstGeom prst="rect">
+            <a:avLst/>
+          </a:prstGeom>
+          <a:noFill/>
+        </p:spPr>
+        <p:txBody>
+          <a:bodyPr wrap="square" anchor="t">
+            <a:spAutoFit/>
+          </a:bodyPr>
+          <a:lstStyle/>
+          <a:p>
+            <a:pPr algn="l">
+              <a:lnSpc>
+                <a:spcPct val="100000"/>
+              </a:lnSpc>
+            </a:pPr>
+            <a:r>
+              <a:rPr sz="2300" b="1">
+                <a:solidFill>
+                  <a:srgbClr val="1E2340"/>
+                </a:solidFill>
+                <a:latin typeface="Malgun Gothic"/>
+              </a:rPr>
+              <a:t>🤖 수업 종료 후 AI 코칭</a:t>
+            </a:r>
+          </a:p>
+        </p:txBody>
+      </p:sp>
+      <p:sp>
+        <p:nvSpPr>
+          <p:cNvPr id="9" name="TextBox 8"/>
+          <p:cNvSpPr txBox="1"/>
+          <p:nvPr/>
+        </p:nvSpPr>
+        <p:spPr>
+          <a:xfrm>
+            <a:off x="1417320" y="1353312"/>
+            <a:ext cx="10424160" cy="320040"/>
+          </a:xfrm>
+          <a:prstGeom prst="rect">
+            <a:avLst/>
+          </a:prstGeom>
+          <a:noFill/>
+        </p:spPr>
+        <p:txBody>
+          <a:bodyPr wrap="square" anchor="t">
+            <a:spAutoFit/>
+          </a:bodyPr>
+          <a:lstStyle/>
+          <a:p>
+            <a:pPr algn="l">
+              <a:lnSpc>
+                <a:spcPct val="100000"/>
+              </a:lnSpc>
+            </a:pPr>
+            <a:r>
+              <a:rPr sz="1300" b="0">
+                <a:solidFill>
+                  <a:srgbClr val="64748B"/>
+                </a:solidFill>
+                <a:latin typeface="Malgun Gothic"/>
+              </a:rPr>
+              <a:t>잘한 점·개선점·오늘의 실천 1가지</a:t>
+            </a:r>
+          </a:p>
+        </p:txBody>
+      </p:sp>
+      <p:sp>
+        <p:nvSpPr>
+          <p:cNvPr id="10" name="Rounded Rectangle 9"/>
+          <p:cNvSpPr/>
+          <p:nvPr/>
+        </p:nvSpPr>
+        <p:spPr>
+          <a:xfrm>
+            <a:off x="365760" y="1828800"/>
+            <a:ext cx="11430000" cy="777240"/>
+          </a:xfrm>
+          <a:prstGeom prst="roundRect">
+            <a:avLst/>
+          </a:prstGeom>
+          <a:solidFill>
+            <a:srgbClr val="FFF4E6"/>
+          </a:solidFill>
+          <a:ln>
+            <a:noFill/>
+          </a:ln>
+          <a:effectLst/>
+        </p:spPr>
+        <p:style>
+          <a:lnRef idx="1">
+            <a:schemeClr val="accent1"/>
+          </a:lnRef>
+          <a:fillRef idx="3">
+            <a:schemeClr val="accent1"/>
+          </a:fillRef>
+          <a:effectRef idx="2">
+            <a:schemeClr val="accent1"/>
+          </a:effectRef>
+          <a:fontRef idx="minor">
+            <a:schemeClr val="lt1"/>
+          </a:fontRef>
+        </p:style>
+        <p:txBody>
+          <a:bodyPr rtlCol="0" anchor="ctr"/>
+          <a:lstStyle/>
+          <a:p>
+            <a:pPr algn="ctr"/>
+          </a:p>
+        </p:txBody>
+      </p:sp>
+      <p:sp>
+        <p:nvSpPr>
+          <p:cNvPr id="11" name="TextBox 10"/>
+          <p:cNvSpPr txBox="1"/>
+          <p:nvPr/>
+        </p:nvSpPr>
+        <p:spPr>
+          <a:xfrm>
+            <a:off x="548640" y="1901952"/>
+            <a:ext cx="11064240" cy="640080"/>
+          </a:xfrm>
+          <a:prstGeom prst="rect">
+            <a:avLst/>
+          </a:prstGeom>
+          <a:noFill/>
+        </p:spPr>
+        <p:txBody>
+          <a:bodyPr wrap="square" anchor="t">
+            <a:spAutoFit/>
+          </a:bodyPr>
+          <a:lstStyle/>
+          <a:p>
+            <a:pPr algn="l">
+              <a:lnSpc>
+                <a:spcPct val="115000"/>
+              </a:lnSpc>
+            </a:pPr>
+            <a:r>
+              <a:rPr sz="1200" b="0">
+                <a:solidFill>
+                  <a:srgbClr val="334155"/>
+                </a:solidFill>
+                <a:latin typeface="Malgun Gothic"/>
+              </a:rPr>
+              <a:t>수업을 마치고 나가면, AI가 이번 수업을 분석해 ‘잘하신 점 / 개선점 / 오늘의 실천 1가지’ 를 한국어·영어로 코칭 카드로 보여줘요. 발화 비율·참여도·칭찬 횟수 같은 실제 수업 신호를 바탕으로, 감시가 아닌 따뜻한 코칭 톤으로 도와줘요.</a:t>
+            </a:r>
+          </a:p>
+        </p:txBody>
+      </p:sp>
+      <p:sp>
+        <p:nvSpPr>
+          <p:cNvPr id="12" name="TextBox 11"/>
+          <p:cNvSpPr txBox="1"/>
+          <p:nvPr/>
+        </p:nvSpPr>
+        <p:spPr>
+          <a:xfrm>
+            <a:off x="457200" y="2743200"/>
+            <a:ext cx="5669280" cy="320040"/>
+          </a:xfrm>
+          <a:prstGeom prst="rect">
+            <a:avLst/>
+          </a:prstGeom>
+          <a:noFill/>
+        </p:spPr>
+        <p:txBody>
+          <a:bodyPr wrap="square" anchor="t">
+            <a:spAutoFit/>
+          </a:bodyPr>
+          <a:lstStyle/>
+          <a:p>
+            <a:pPr algn="l">
+              <a:lnSpc>
+                <a:spcPct val="100000"/>
+              </a:lnSpc>
+            </a:pPr>
+            <a:r>
+              <a:rPr sz="1350" b="1">
+                <a:solidFill>
+                  <a:srgbClr val="EA580C"/>
+                </a:solidFill>
+                <a:latin typeface="Malgun Gothic"/>
+              </a:rPr>
+              <a:t>사용 방법</a:t>
+            </a:r>
+          </a:p>
+        </p:txBody>
+      </p:sp>
+      <p:sp>
+        <p:nvSpPr>
+          <p:cNvPr id="13" name="TextBox 12"/>
+          <p:cNvSpPr txBox="1"/>
+          <p:nvPr/>
+        </p:nvSpPr>
+        <p:spPr>
+          <a:xfrm>
+            <a:off x="457200" y="3108960"/>
+            <a:ext cx="5669280" cy="2377440"/>
+          </a:xfrm>
+          <a:prstGeom prst="rect">
+            <a:avLst/>
+          </a:prstGeom>
+          <a:noFill/>
+        </p:spPr>
+        <p:txBody>
+          <a:bodyPr wrap="square">
+            <a:spAutoFit/>
+          </a:bodyPr>
+          <a:lstStyle/>
+          <a:p>
+            <a:pPr>
+              <a:lnSpc>
+                <a:spcPct val="115000"/>
+              </a:lnSpc>
+              <a:spcAft>
+                <a:spcPts val="600"/>
+              </a:spcAft>
+            </a:pPr>
+            <a:r>
+              <a:rPr sz="1050" b="1">
+                <a:solidFill>
+                  <a:srgbClr val="EA580C"/>
+                </a:solidFill>
+                <a:latin typeface="Malgun Gothic"/>
+              </a:rPr>
+              <a:t>● </a:t>
+            </a:r>
+            <a:r>
+              <a:rPr sz="1250">
+                <a:solidFill>
+                  <a:srgbClr val="334155"/>
+                </a:solidFill>
+                <a:latin typeface="Malgun Gothic"/>
+              </a:rPr>
+              <a:t>화상수업을 ‘나가기’ 로 종료하면 코칭 카드가 자동으로 떠요.</a:t>
+            </a:r>
+          </a:p>
+          <a:p>
+            <a:pPr>
+              <a:lnSpc>
+                <a:spcPct val="115000"/>
+              </a:lnSpc>
+              <a:spcAft>
+                <a:spcPts val="600"/>
+              </a:spcAft>
+            </a:pPr>
+            <a:r>
+              <a:rPr sz="1050" b="1">
+                <a:solidFill>
+                  <a:srgbClr val="EA580C"/>
+                </a:solidFill>
+                <a:latin typeface="Malgun Gothic"/>
+              </a:rPr>
+              <a:t>● </a:t>
+            </a:r>
+            <a:r>
+              <a:rPr sz="1250">
+                <a:solidFill>
+                  <a:srgbClr val="334155"/>
+                </a:solidFill>
+                <a:latin typeface="Malgun Gothic"/>
+              </a:rPr>
+              <a:t>🇰🇷 한국어 / 🇺🇸 English 토글로 원하는 언어로 볼 수 있어요.</a:t>
+            </a:r>
+          </a:p>
+          <a:p>
+            <a:pPr>
+              <a:lnSpc>
+                <a:spcPct val="115000"/>
+              </a:lnSpc>
+              <a:spcAft>
+                <a:spcPts val="600"/>
+              </a:spcAft>
+            </a:pPr>
+            <a:r>
+              <a:rPr sz="1050" b="1">
+                <a:solidFill>
+                  <a:srgbClr val="EA580C"/>
+                </a:solidFill>
+                <a:latin typeface="Malgun Gothic"/>
+              </a:rPr>
+              <a:t>● </a:t>
+            </a:r>
+            <a:r>
+              <a:rPr sz="1250">
+                <a:solidFill>
+                  <a:srgbClr val="334155"/>
+                </a:solidFill>
+                <a:latin typeface="Malgun Gothic"/>
+              </a:rPr>
+              <a:t>참여도·발화비율·칭찬 횟수 요약과 잘한 점·개선점·실천 1가지를 확인해요.</a:t>
+            </a:r>
+          </a:p>
+          <a:p>
+            <a:pPr>
+              <a:lnSpc>
+                <a:spcPct val="115000"/>
+              </a:lnSpc>
+              <a:spcAft>
+                <a:spcPts val="600"/>
+              </a:spcAft>
+            </a:pPr>
+            <a:r>
+              <a:rPr sz="1050" b="1">
+                <a:solidFill>
+                  <a:srgbClr val="EA580C"/>
+                </a:solidFill>
+                <a:latin typeface="Malgun Gothic"/>
+              </a:rPr>
+              <a:t>● </a:t>
+            </a:r>
+            <a:r>
+              <a:rPr sz="1250">
+                <a:solidFill>
+                  <a:srgbClr val="334155"/>
+                </a:solidFill>
+                <a:latin typeface="Malgun Gothic"/>
+              </a:rPr>
+              <a:t>‘전체 리포트’ 를 누르면 수업 상세 + 최근 코칭 이력(품질 점수·총평)을 볼 수 있어요.</a:t>
+            </a:r>
+          </a:p>
+        </p:txBody>
+      </p:sp>
+      <p:sp>
+        <p:nvSpPr>
+          <p:cNvPr id="14" name="Rounded Rectangle 13"/>
+          <p:cNvSpPr/>
+          <p:nvPr/>
+        </p:nvSpPr>
+        <p:spPr>
+          <a:xfrm>
+            <a:off x="457200" y="4782312"/>
+            <a:ext cx="5669280" cy="1316736"/>
+          </a:xfrm>
+          <a:prstGeom prst="roundRect">
+            <a:avLst/>
+          </a:prstGeom>
+          <a:solidFill>
+            <a:srgbClr val="F4F7FF"/>
+          </a:solidFill>
+          <a:ln w="12700">
+            <a:solidFill>
+              <a:srgbClr val="EA580C"/>
+            </a:solidFill>
+          </a:ln>
+          <a:effectLst/>
+        </p:spPr>
+        <p:style>
+          <a:lnRef idx="1">
+            <a:schemeClr val="accent1"/>
+          </a:lnRef>
+          <a:fillRef idx="3">
+            <a:schemeClr val="accent1"/>
+          </a:fillRef>
+          <a:effectRef idx="2">
+            <a:schemeClr val="accent1"/>
+          </a:effectRef>
+          <a:fontRef idx="minor">
+            <a:schemeClr val="lt1"/>
+          </a:fontRef>
+        </p:style>
+        <p:txBody>
+          <a:bodyPr rtlCol="0" anchor="ctr"/>
+          <a:lstStyle/>
+          <a:p>
+            <a:pPr algn="ctr"/>
+          </a:p>
+        </p:txBody>
+      </p:sp>
+      <p:sp>
+        <p:nvSpPr>
+          <p:cNvPr id="15" name="TextBox 14"/>
+          <p:cNvSpPr txBox="1"/>
+          <p:nvPr/>
+        </p:nvSpPr>
+        <p:spPr>
+          <a:xfrm>
+            <a:off x="594360" y="4837175"/>
+            <a:ext cx="5394960" cy="274320"/>
+          </a:xfrm>
+          <a:prstGeom prst="rect">
+            <a:avLst/>
+          </a:prstGeom>
+          <a:noFill/>
+        </p:spPr>
+        <p:txBody>
+          <a:bodyPr wrap="square" anchor="t">
+            <a:spAutoFit/>
+          </a:bodyPr>
+          <a:lstStyle/>
+          <a:p>
+            <a:pPr algn="l">
+              <a:lnSpc>
+                <a:spcPct val="100000"/>
+              </a:lnSpc>
+            </a:pPr>
+            <a:r>
+              <a:rPr sz="1150" b="1">
+                <a:solidFill>
+                  <a:srgbClr val="EA580C"/>
+                </a:solidFill>
+                <a:latin typeface="Malgun Gothic"/>
+              </a:rPr>
+              <a:t>✅ 핵심 포인트</a:t>
+            </a:r>
+          </a:p>
+        </p:txBody>
+      </p:sp>
+      <p:sp>
+        <p:nvSpPr>
+          <p:cNvPr id="16" name="TextBox 15"/>
+          <p:cNvSpPr txBox="1"/>
+          <p:nvPr/>
+        </p:nvSpPr>
+        <p:spPr>
+          <a:xfrm>
+            <a:off x="594360" y="5111496"/>
+            <a:ext cx="5394960" cy="950976"/>
+          </a:xfrm>
+          <a:prstGeom prst="rect">
+            <a:avLst/>
+          </a:prstGeom>
+          <a:noFill/>
+        </p:spPr>
+        <p:txBody>
+          <a:bodyPr wrap="square">
+            <a:spAutoFit/>
+          </a:bodyPr>
+          <a:lstStyle/>
+          <a:p>
+            <a:pPr>
+              <a:lnSpc>
+                <a:spcPct val="115000"/>
+              </a:lnSpc>
+              <a:spcAft>
+                <a:spcPts val="200"/>
+              </a:spcAft>
+            </a:pPr>
+            <a:r>
+              <a:rPr sz="900" b="1">
+                <a:solidFill>
+                  <a:srgbClr val="EA580C"/>
+                </a:solidFill>
+                <a:latin typeface="Malgun Gothic"/>
+              </a:rPr>
+              <a:t>● </a:t>
+            </a:r>
+            <a:r>
+              <a:rPr sz="1100">
+                <a:solidFill>
+                  <a:srgbClr val="334155"/>
+                </a:solidFill>
+                <a:latin typeface="Malgun Gothic"/>
+              </a:rPr>
+              <a:t>원어민 강사를 위해 영어가 기본, 한국어도 함께 제공돼요.</a:t>
+            </a:r>
+          </a:p>
+          <a:p>
+            <a:pPr>
+              <a:lnSpc>
+                <a:spcPct val="115000"/>
+              </a:lnSpc>
+              <a:spcAft>
+                <a:spcPts val="200"/>
+              </a:spcAft>
+            </a:pPr>
+            <a:r>
+              <a:rPr sz="900" b="1">
+                <a:solidFill>
+                  <a:srgbClr val="EA580C"/>
+                </a:solidFill>
+                <a:latin typeface="Malgun Gothic"/>
+              </a:rPr>
+              <a:t>● </a:t>
+            </a:r>
+            <a:r>
+              <a:rPr sz="1100">
+                <a:solidFill>
+                  <a:srgbClr val="334155"/>
+                </a:solidFill>
+                <a:latin typeface="Malgun Gothic"/>
+              </a:rPr>
+              <a:t>수업 품질 점수(0~100) 와 상세 총평으로 스스로 성장 포인트를 잡을 수 있어요.</a:t>
+            </a:r>
+          </a:p>
+          <a:p>
+            <a:pPr>
+              <a:lnSpc>
+                <a:spcPct val="115000"/>
+              </a:lnSpc>
+              <a:spcAft>
+                <a:spcPts val="200"/>
+              </a:spcAft>
+            </a:pPr>
+            <a:r>
+              <a:rPr sz="900" b="1">
+                <a:solidFill>
+                  <a:srgbClr val="EA580C"/>
+                </a:solidFill>
+                <a:latin typeface="Malgun Gothic"/>
+              </a:rPr>
+              <a:t>● </a:t>
+            </a:r>
+            <a:r>
+              <a:rPr sz="1100">
+                <a:solidFill>
+                  <a:srgbClr val="334155"/>
+                </a:solidFill>
+                <a:latin typeface="Malgun Gothic"/>
+              </a:rPr>
+              <a:t>AI가 잠시 느려도 양쪽 언어 기본 코칭은 항상 제공돼요.</a:t>
+            </a:r>
+          </a:p>
+        </p:txBody>
+      </p:sp>
+      <p:sp>
+        <p:nvSpPr>
+          <p:cNvPr id="17" name="Rounded Rectangle 16"/>
+          <p:cNvSpPr/>
+          <p:nvPr/>
+        </p:nvSpPr>
+        <p:spPr>
+          <a:xfrm>
+            <a:off x="457200" y="6208775"/>
+            <a:ext cx="5669280" cy="640080"/>
+          </a:xfrm>
+          <a:prstGeom prst="roundRect">
+            <a:avLst/>
+          </a:prstGeom>
+          <a:solidFill>
+            <a:srgbClr val="FFFBEB"/>
+          </a:solidFill>
+          <a:ln w="12700">
+            <a:solidFill>
+              <a:srgbClr val="F59E0B"/>
+            </a:solidFill>
+          </a:ln>
+          <a:effectLst/>
+        </p:spPr>
+        <p:style>
+          <a:lnRef idx="1">
+            <a:schemeClr val="accent1"/>
+          </a:lnRef>
+          <a:fillRef idx="3">
+            <a:schemeClr val="accent1"/>
+          </a:fillRef>
+          <a:effectRef idx="2">
+            <a:schemeClr val="accent1"/>
+          </a:effectRef>
+          <a:fontRef idx="minor">
+            <a:schemeClr val="lt1"/>
+          </a:fontRef>
+        </p:style>
+        <p:txBody>
+          <a:bodyPr rtlCol="0" anchor="ctr"/>
+          <a:lstStyle/>
+          <a:p>
+            <a:pPr algn="ctr"/>
+          </a:p>
+        </p:txBody>
+      </p:sp>
+      <p:sp>
+        <p:nvSpPr>
+          <p:cNvPr id="18" name="TextBox 17"/>
+          <p:cNvSpPr txBox="1"/>
+          <p:nvPr/>
+        </p:nvSpPr>
+        <p:spPr>
+          <a:xfrm>
+            <a:off x="594360" y="6254495"/>
+            <a:ext cx="5394960" cy="548640"/>
+          </a:xfrm>
+          <a:prstGeom prst="rect">
+            <a:avLst/>
+          </a:prstGeom>
+          <a:noFill/>
+        </p:spPr>
+        <p:txBody>
+          <a:bodyPr wrap="square" anchor="t">
+            <a:spAutoFit/>
+          </a:bodyPr>
+          <a:lstStyle/>
+          <a:p>
+            <a:pPr algn="l">
+              <a:lnSpc>
+                <a:spcPct val="105000"/>
+              </a:lnSpc>
+            </a:pPr>
+            <a:r>
+              <a:rPr sz="1050" b="0">
+                <a:solidFill>
+                  <a:srgbClr val="92670A"/>
+                </a:solidFill>
+                <a:latin typeface="Malgun Gothic"/>
+              </a:rPr>
+              <a:t>⚠️ 알아두기 · 코칭은 강사 본인의 성장을 돕기 위한 것이에요. 관리자에게는 월 누적 요약만 전달돼요.</a:t>
+            </a:r>
+          </a:p>
+        </p:txBody>
+      </p:sp>
+      <p:sp>
+        <p:nvSpPr>
+          <p:cNvPr id="19" name="Rounded Rectangle 18"/>
+          <p:cNvSpPr/>
+          <p:nvPr/>
+        </p:nvSpPr>
+        <p:spPr>
+          <a:xfrm>
+            <a:off x="457200" y="6940295"/>
+            <a:ext cx="5669280" cy="658368"/>
+          </a:xfrm>
+          <a:prstGeom prst="roundRect">
+            <a:avLst/>
+          </a:prstGeom>
+          <a:solidFill>
+            <a:srgbClr val="FFF7E6"/>
+          </a:solidFill>
+          <a:ln w="12700">
+            <a:solidFill>
+              <a:srgbClr val="FFB020"/>
+            </a:solidFill>
+          </a:ln>
+          <a:effectLst/>
+        </p:spPr>
+        <p:style>
+          <a:lnRef idx="1">
+            <a:schemeClr val="accent1"/>
+          </a:lnRef>
+          <a:fillRef idx="3">
+            <a:schemeClr val="accent1"/>
+          </a:fillRef>
+          <a:effectRef idx="2">
+            <a:schemeClr val="accent1"/>
+          </a:effectRef>
+          <a:fontRef idx="minor">
+            <a:schemeClr val="lt1"/>
+          </a:fontRef>
+        </p:style>
+        <p:txBody>
+          <a:bodyPr rtlCol="0" anchor="ctr"/>
+          <a:lstStyle/>
+          <a:p>
+            <a:pPr algn="ctr"/>
+          </a:p>
+        </p:txBody>
+      </p:sp>
+      <p:sp>
+        <p:nvSpPr>
+          <p:cNvPr id="20" name="TextBox 19"/>
+          <p:cNvSpPr txBox="1"/>
+          <p:nvPr/>
+        </p:nvSpPr>
+        <p:spPr>
+          <a:xfrm>
+            <a:off x="594360" y="6986015"/>
+            <a:ext cx="5394960" cy="566928"/>
+          </a:xfrm>
+          <a:prstGeom prst="rect">
+            <a:avLst/>
+          </a:prstGeom>
+          <a:noFill/>
+        </p:spPr>
+        <p:txBody>
+          <a:bodyPr wrap="square" anchor="t">
+            <a:spAutoFit/>
+          </a:bodyPr>
+          <a:lstStyle/>
+          <a:p>
+            <a:pPr algn="l">
+              <a:lnSpc>
+                <a:spcPct val="105000"/>
+              </a:lnSpc>
+            </a:pPr>
+            <a:r>
+              <a:rPr sz="1050" b="0">
+                <a:solidFill>
+                  <a:srgbClr val="5B4A2A"/>
+                </a:solidFill>
+                <a:latin typeface="Malgun Gothic"/>
+              </a:rPr>
+              <a:t>💡 꿀팁 · 매 수업 ‘오늘의 실천 1가지’만 다음 수업에서 시도해도 발화 유도가 눈에 띄게 좋아져요.</a:t>
+            </a:r>
+          </a:p>
+        </p:txBody>
+      </p:sp>
+      <p:sp>
+        <p:nvSpPr>
+          <p:cNvPr id="21" name="Rectangle 20"/>
+          <p:cNvSpPr/>
+          <p:nvPr/>
+        </p:nvSpPr>
+        <p:spPr>
+          <a:xfrm>
+            <a:off x="6300216" y="2345436"/>
+            <a:ext cx="5596128" cy="3538728"/>
+          </a:xfrm>
+          <a:prstGeom prst="rect">
+            <a:avLst/>
+          </a:prstGeom>
+          <a:solidFill>
+            <a:srgbClr val="FFFFFF"/>
+          </a:solidFill>
+          <a:ln w="12700">
+            <a:solidFill>
+              <a:srgbClr val="E2E8F0"/>
+            </a:solidFill>
+          </a:ln>
+          <a:effectLst/>
+        </p:spPr>
+        <p:style>
+          <a:lnRef idx="1">
+            <a:schemeClr val="accent1"/>
+          </a:lnRef>
+          <a:fillRef idx="3">
+            <a:schemeClr val="accent1"/>
+          </a:fillRef>
+          <a:effectRef idx="2">
+            <a:schemeClr val="accent1"/>
+          </a:effectRef>
+          <a:fontRef idx="minor">
+            <a:schemeClr val="lt1"/>
+          </a:fontRef>
+        </p:style>
+        <p:txBody>
+          <a:bodyPr rtlCol="0" anchor="ctr"/>
+          <a:lstStyle/>
+          <a:p>
+            <a:pPr algn="ctr"/>
+          </a:p>
+        </p:txBody>
+      </p:sp>
+      <p:pic>
+        <p:nvPicPr>
+          <p:cNvPr id="22" name="Picture 21" descr="teacher_aicoach.jpg"/>
+          <p:cNvPicPr>
+            <a:picLocks noChangeAspect="1"/>
+          </p:cNvPicPr>
+          <p:nvPr/>
+        </p:nvPicPr>
+        <p:blipFill>
+          <a:blip r:embed="rId2"/>
+          <a:stretch>
+            <a:fillRect/>
+          </a:stretch>
+        </p:blipFill>
+        <p:spPr>
+          <a:xfrm>
+            <a:off x="6355080" y="2400300"/>
+            <a:ext cx="5486400" cy="3429000"/>
+          </a:xfrm>
+          <a:prstGeom prst="rect">
+            <a:avLst/>
+          </a:prstGeom>
+        </p:spPr>
+      </p:pic>
+    </p:spTree>
+  </p:cSld>
+  <p:clrMapOvr>
+    <a:masterClrMapping/>
+  </p:clrMapOvr>
+</p:sld>
+</file>
+
+<file path=ppt/slides/slide29.xml><?xml version="1.0" encoding="utf-8"?>
 <p:sld xmlns:a="http://schemas.openxmlformats.org/drawingml/2006/main" xmlns:p="http://schemas.openxmlformats.org/presentationml/2006/main" xmlns:r="http://schemas.openxmlformats.org/officeDocument/2006/relationships">
   <p:cSld>
     <p:bg>
@@ -23431,351 +24474,6 @@
 </p:sld>
 </file>
 
-<file path=ppt/slides/slide29.xml><?xml version="1.0" encoding="utf-8"?>
-<p:sld xmlns:a="http://schemas.openxmlformats.org/drawingml/2006/main" xmlns:p="http://schemas.openxmlformats.org/presentationml/2006/main" xmlns:r="http://schemas.openxmlformats.org/officeDocument/2006/relationships">
-  <p:cSld>
-    <p:bg>
-      <p:bgPr>
-        <a:solidFill>
-          <a:srgbClr val="FFFFFF"/>
-        </a:solidFill>
-        <a:effectLst/>
-      </p:bgPr>
-    </p:bg>
-    <p:spTree>
-      <p:nvGrpSpPr>
-        <p:cNvPr id="1" name=""/>
-        <p:cNvGrpSpPr/>
-        <p:nvPr/>
-      </p:nvGrpSpPr>
-      <p:grpSpPr/>
-      <p:sp>
-        <p:nvSpPr>
-          <p:cNvPr id="2" name="Rectangle 1"/>
-          <p:cNvSpPr/>
-          <p:nvPr/>
-        </p:nvSpPr>
-        <p:spPr>
-          <a:xfrm>
-            <a:off x="0" y="0"/>
-            <a:ext cx="12191695" cy="566928"/>
-          </a:xfrm>
-          <a:prstGeom prst="rect">
-            <a:avLst/>
-          </a:prstGeom>
-          <a:solidFill>
-            <a:srgbClr val="EA580C"/>
-          </a:solidFill>
-          <a:ln>
-            <a:noFill/>
-          </a:ln>
-          <a:effectLst/>
-        </p:spPr>
-        <p:style>
-          <a:lnRef idx="1">
-            <a:schemeClr val="accent1"/>
-          </a:lnRef>
-          <a:fillRef idx="3">
-            <a:schemeClr val="accent1"/>
-          </a:fillRef>
-          <a:effectRef idx="2">
-            <a:schemeClr val="accent1"/>
-          </a:effectRef>
-          <a:fontRef idx="minor">
-            <a:schemeClr val="lt1"/>
-          </a:fontRef>
-        </p:style>
-        <p:txBody>
-          <a:bodyPr rtlCol="0" anchor="ctr"/>
-          <a:lstStyle/>
-          <a:p>
-            <a:pPr algn="ctr"/>
-          </a:p>
-        </p:txBody>
-      </p:sp>
-      <p:sp>
-        <p:nvSpPr>
-          <p:cNvPr id="3" name="Rectangle 2"/>
-          <p:cNvSpPr/>
-          <p:nvPr/>
-        </p:nvSpPr>
-        <p:spPr>
-          <a:xfrm>
-            <a:off x="0" y="566928"/>
-            <a:ext cx="12191695" cy="54864"/>
-          </a:xfrm>
-          <a:prstGeom prst="rect">
-            <a:avLst/>
-          </a:prstGeom>
-          <a:solidFill>
-            <a:srgbClr val="FFB020"/>
-          </a:solidFill>
-          <a:ln>
-            <a:noFill/>
-          </a:ln>
-          <a:effectLst/>
-        </p:spPr>
-        <p:style>
-          <a:lnRef idx="1">
-            <a:schemeClr val="accent1"/>
-          </a:lnRef>
-          <a:fillRef idx="3">
-            <a:schemeClr val="accent1"/>
-          </a:fillRef>
-          <a:effectRef idx="2">
-            <a:schemeClr val="accent1"/>
-          </a:effectRef>
-          <a:fontRef idx="minor">
-            <a:schemeClr val="lt1"/>
-          </a:fontRef>
-        </p:style>
-        <p:txBody>
-          <a:bodyPr rtlCol="0" anchor="ctr"/>
-          <a:lstStyle/>
-          <a:p>
-            <a:pPr algn="ctr"/>
-          </a:p>
-        </p:txBody>
-      </p:sp>
-      <p:sp>
-        <p:nvSpPr>
-          <p:cNvPr id="4" name="TextBox 3"/>
-          <p:cNvSpPr txBox="1"/>
-          <p:nvPr/>
-        </p:nvSpPr>
-        <p:spPr>
-          <a:xfrm>
-            <a:off x="365760" y="27432"/>
-            <a:ext cx="7315200" cy="502920"/>
-          </a:xfrm>
-          <a:prstGeom prst="rect">
-            <a:avLst/>
-          </a:prstGeom>
-          <a:noFill/>
-        </p:spPr>
-        <p:txBody>
-          <a:bodyPr wrap="square" anchor="ctr">
-            <a:spAutoFit/>
-          </a:bodyPr>
-          <a:lstStyle/>
-          <a:p>
-            <a:pPr algn="l">
-              <a:lnSpc>
-                <a:spcPct val="100000"/>
-              </a:lnSpc>
-            </a:pPr>
-            <a:r>
-              <a:rPr sz="1500" b="1">
-                <a:solidFill>
-                  <a:srgbClr val="FFFFFF"/>
-                </a:solidFill>
-                <a:latin typeface="Malgun Gothic"/>
-              </a:rPr>
-              <a:t>👩‍🏫 망고아이 교사용 사용설명서</a:t>
-            </a:r>
-          </a:p>
-        </p:txBody>
-      </p:sp>
-      <p:sp>
-        <p:nvSpPr>
-          <p:cNvPr id="5" name="TextBox 4"/>
-          <p:cNvSpPr txBox="1"/>
-          <p:nvPr/>
-        </p:nvSpPr>
-        <p:spPr>
-          <a:xfrm>
-            <a:off x="8168335" y="27432"/>
-            <a:ext cx="3657600" cy="502920"/>
-          </a:xfrm>
-          <a:prstGeom prst="rect">
-            <a:avLst/>
-          </a:prstGeom>
-          <a:noFill/>
-        </p:spPr>
-        <p:txBody>
-          <a:bodyPr wrap="square" anchor="ctr">
-            <a:spAutoFit/>
-          </a:bodyPr>
-          <a:lstStyle/>
-          <a:p>
-            <a:pPr algn="r">
-              <a:lnSpc>
-                <a:spcPct val="100000"/>
-              </a:lnSpc>
-            </a:pPr>
-            <a:r>
-              <a:rPr sz="1300" b="1">
-                <a:solidFill>
-                  <a:srgbClr val="F1F5F9"/>
-                </a:solidFill>
-                <a:latin typeface="Malgun Gothic"/>
-              </a:rPr>
-              <a:t>한눈에 보는 데이터</a:t>
-            </a:r>
-          </a:p>
-        </p:txBody>
-      </p:sp>
-      <p:sp>
-        <p:nvSpPr>
-          <p:cNvPr id="6" name="TextBox 5"/>
-          <p:cNvSpPr txBox="1"/>
-          <p:nvPr/>
-        </p:nvSpPr>
-        <p:spPr>
-          <a:xfrm>
-            <a:off x="365760" y="868680"/>
-            <a:ext cx="9144000" cy="457200"/>
-          </a:xfrm>
-          <a:prstGeom prst="rect">
-            <a:avLst/>
-          </a:prstGeom>
-          <a:noFill/>
-        </p:spPr>
-        <p:txBody>
-          <a:bodyPr wrap="square" anchor="t">
-            <a:spAutoFit/>
-          </a:bodyPr>
-          <a:lstStyle/>
-          <a:p>
-            <a:pPr algn="l">
-              <a:lnSpc>
-                <a:spcPct val="100000"/>
-              </a:lnSpc>
-            </a:pPr>
-            <a:r>
-              <a:rPr sz="2200" b="1">
-                <a:solidFill>
-                  <a:srgbClr val="EA580C"/>
-                </a:solidFill>
-                <a:latin typeface="Malgun Gothic"/>
-              </a:rPr>
-              <a:t>📊 한눈에 보는 데이터</a:t>
-            </a:r>
-          </a:p>
-        </p:txBody>
-      </p:sp>
-      <p:sp>
-        <p:nvSpPr>
-          <p:cNvPr id="7" name="TextBox 6"/>
-          <p:cNvSpPr txBox="1"/>
-          <p:nvPr/>
-        </p:nvSpPr>
-        <p:spPr>
-          <a:xfrm>
-            <a:off x="457200" y="1554480"/>
-            <a:ext cx="5486400" cy="365760"/>
-          </a:xfrm>
-          <a:prstGeom prst="rect">
-            <a:avLst/>
-          </a:prstGeom>
-          <a:noFill/>
-        </p:spPr>
-        <p:txBody>
-          <a:bodyPr wrap="square" anchor="t">
-            <a:spAutoFit/>
-          </a:bodyPr>
-          <a:lstStyle/>
-          <a:p>
-            <a:pPr algn="l">
-              <a:lnSpc>
-                <a:spcPct val="100000"/>
-              </a:lnSpc>
-            </a:pPr>
-            <a:r>
-              <a:rPr sz="1400" b="1">
-                <a:solidFill>
-                  <a:srgbClr val="1E2340"/>
-                </a:solidFill>
-                <a:latin typeface="Malgun Gothic"/>
-              </a:rPr>
-              <a:t>사전 점검 항목(예시 점수)</a:t>
-            </a:r>
-          </a:p>
-        </p:txBody>
-      </p:sp>
-      <p:graphicFrame>
-        <p:nvGraphicFramePr>
-          <p:cNvPr id="8" name="Chart 7"/>
-          <p:cNvGraphicFramePr>
-            <a:graphicFrameLocks noGrp="1"/>
-          </p:cNvGraphicFramePr>
-          <p:nvPr/>
-        </p:nvGraphicFramePr>
-        <p:xfrm>
-          <a:off x="457200" y="1920240"/>
-          <a:ext cx="5486400" cy="4206240"/>
-        </p:xfrm>
-        <a:graphic>
-          <a:graphicData uri="http://schemas.openxmlformats.org/drawingml/2006/chart">
-            <c:chart xmlns:c="http://schemas.openxmlformats.org/drawingml/2006/chart" r:id="rId2"/>
-          </a:graphicData>
-        </a:graphic>
-      </p:graphicFrame>
-      <p:sp>
-        <p:nvSpPr>
-          <p:cNvPr id="9" name="TextBox 8"/>
-          <p:cNvSpPr txBox="1"/>
-          <p:nvPr/>
-        </p:nvSpPr>
-        <p:spPr>
-          <a:xfrm>
-            <a:off x="6309360" y="1554480"/>
-            <a:ext cx="5486400" cy="365760"/>
-          </a:xfrm>
-          <a:prstGeom prst="rect">
-            <a:avLst/>
-          </a:prstGeom>
-          <a:noFill/>
-        </p:spPr>
-        <p:txBody>
-          <a:bodyPr wrap="square" anchor="t">
-            <a:spAutoFit/>
-          </a:bodyPr>
-          <a:lstStyle/>
-          <a:p>
-            <a:pPr algn="l">
-              <a:lnSpc>
-                <a:spcPct val="100000"/>
-              </a:lnSpc>
-            </a:pPr>
-            <a:r>
-              <a:rPr sz="1400" b="1">
-                <a:solidFill>
-                  <a:srgbClr val="1E2340"/>
-                </a:solidFill>
-                <a:latin typeface="Malgun Gothic"/>
-              </a:rPr>
-              <a:t>좋은 수업 요소</a:t>
-            </a:r>
-          </a:p>
-        </p:txBody>
-      </p:sp>
-      <p:graphicFrame>
-        <p:nvGraphicFramePr>
-          <p:cNvPr id="10" name="Chart 9"/>
-          <p:cNvGraphicFramePr>
-            <a:graphicFrameLocks noGrp="1"/>
-          </p:cNvGraphicFramePr>
-          <p:nvPr/>
-        </p:nvGraphicFramePr>
-        <p:xfrm>
-          <a:off x="6309360" y="1920240"/>
-          <a:ext cx="5486400" cy="4206240"/>
-        </p:xfrm>
-        <a:graphic>
-          <a:graphicData uri="http://schemas.openxmlformats.org/drawingml/2006/chart">
-            <c:chart xmlns:c="http://schemas.openxmlformats.org/drawingml/2006/chart" r:id="rId3"/>
-          </a:graphicData>
-        </a:graphic>
-      </p:graphicFrame>
-    </p:spTree>
-  </p:cSld>
-  <p:clrMapOvr>
-    <a:masterClrMapping/>
-  </p:clrMapOvr>
-</p:sld>
-</file>
-
 <file path=ppt/slides/slide3.xml><?xml version="1.0" encoding="utf-8"?>
 <p:sld xmlns:a="http://schemas.openxmlformats.org/drawingml/2006/main" xmlns:p="http://schemas.openxmlformats.org/presentationml/2006/main" xmlns:r="http://schemas.openxmlformats.org/officeDocument/2006/relationships">
   <p:cSld>
@@ -24856,6 +25554,351 @@
                 </a:solidFill>
                 <a:latin typeface="Malgun Gothic"/>
               </a:rPr>
+              <a:t>한눈에 보는 데이터</a:t>
+            </a:r>
+          </a:p>
+        </p:txBody>
+      </p:sp>
+      <p:sp>
+        <p:nvSpPr>
+          <p:cNvPr id="6" name="TextBox 5"/>
+          <p:cNvSpPr txBox="1"/>
+          <p:nvPr/>
+        </p:nvSpPr>
+        <p:spPr>
+          <a:xfrm>
+            <a:off x="365760" y="868680"/>
+            <a:ext cx="9144000" cy="457200"/>
+          </a:xfrm>
+          <a:prstGeom prst="rect">
+            <a:avLst/>
+          </a:prstGeom>
+          <a:noFill/>
+        </p:spPr>
+        <p:txBody>
+          <a:bodyPr wrap="square" anchor="t">
+            <a:spAutoFit/>
+          </a:bodyPr>
+          <a:lstStyle/>
+          <a:p>
+            <a:pPr algn="l">
+              <a:lnSpc>
+                <a:spcPct val="100000"/>
+              </a:lnSpc>
+            </a:pPr>
+            <a:r>
+              <a:rPr sz="2200" b="1">
+                <a:solidFill>
+                  <a:srgbClr val="EA580C"/>
+                </a:solidFill>
+                <a:latin typeface="Malgun Gothic"/>
+              </a:rPr>
+              <a:t>📊 한눈에 보는 데이터</a:t>
+            </a:r>
+          </a:p>
+        </p:txBody>
+      </p:sp>
+      <p:sp>
+        <p:nvSpPr>
+          <p:cNvPr id="7" name="TextBox 6"/>
+          <p:cNvSpPr txBox="1"/>
+          <p:nvPr/>
+        </p:nvSpPr>
+        <p:spPr>
+          <a:xfrm>
+            <a:off x="457200" y="1554480"/>
+            <a:ext cx="5486400" cy="365760"/>
+          </a:xfrm>
+          <a:prstGeom prst="rect">
+            <a:avLst/>
+          </a:prstGeom>
+          <a:noFill/>
+        </p:spPr>
+        <p:txBody>
+          <a:bodyPr wrap="square" anchor="t">
+            <a:spAutoFit/>
+          </a:bodyPr>
+          <a:lstStyle/>
+          <a:p>
+            <a:pPr algn="l">
+              <a:lnSpc>
+                <a:spcPct val="100000"/>
+              </a:lnSpc>
+            </a:pPr>
+            <a:r>
+              <a:rPr sz="1400" b="1">
+                <a:solidFill>
+                  <a:srgbClr val="1E2340"/>
+                </a:solidFill>
+                <a:latin typeface="Malgun Gothic"/>
+              </a:rPr>
+              <a:t>사전 점검 항목(예시 점수)</a:t>
+            </a:r>
+          </a:p>
+        </p:txBody>
+      </p:sp>
+      <p:graphicFrame>
+        <p:nvGraphicFramePr>
+          <p:cNvPr id="8" name="Chart 7"/>
+          <p:cNvGraphicFramePr>
+            <a:graphicFrameLocks noGrp="1"/>
+          </p:cNvGraphicFramePr>
+          <p:nvPr/>
+        </p:nvGraphicFramePr>
+        <p:xfrm>
+          <a:off x="457200" y="1920240"/>
+          <a:ext cx="5486400" cy="4206240"/>
+        </p:xfrm>
+        <a:graphic>
+          <a:graphicData uri="http://schemas.openxmlformats.org/drawingml/2006/chart">
+            <c:chart xmlns:c="http://schemas.openxmlformats.org/drawingml/2006/chart" r:id="rId2"/>
+          </a:graphicData>
+        </a:graphic>
+      </p:graphicFrame>
+      <p:sp>
+        <p:nvSpPr>
+          <p:cNvPr id="9" name="TextBox 8"/>
+          <p:cNvSpPr txBox="1"/>
+          <p:nvPr/>
+        </p:nvSpPr>
+        <p:spPr>
+          <a:xfrm>
+            <a:off x="6309360" y="1554480"/>
+            <a:ext cx="5486400" cy="365760"/>
+          </a:xfrm>
+          <a:prstGeom prst="rect">
+            <a:avLst/>
+          </a:prstGeom>
+          <a:noFill/>
+        </p:spPr>
+        <p:txBody>
+          <a:bodyPr wrap="square" anchor="t">
+            <a:spAutoFit/>
+          </a:bodyPr>
+          <a:lstStyle/>
+          <a:p>
+            <a:pPr algn="l">
+              <a:lnSpc>
+                <a:spcPct val="100000"/>
+              </a:lnSpc>
+            </a:pPr>
+            <a:r>
+              <a:rPr sz="1400" b="1">
+                <a:solidFill>
+                  <a:srgbClr val="1E2340"/>
+                </a:solidFill>
+                <a:latin typeface="Malgun Gothic"/>
+              </a:rPr>
+              <a:t>좋은 수업 요소</a:t>
+            </a:r>
+          </a:p>
+        </p:txBody>
+      </p:sp>
+      <p:graphicFrame>
+        <p:nvGraphicFramePr>
+          <p:cNvPr id="10" name="Chart 9"/>
+          <p:cNvGraphicFramePr>
+            <a:graphicFrameLocks noGrp="1"/>
+          </p:cNvGraphicFramePr>
+          <p:nvPr/>
+        </p:nvGraphicFramePr>
+        <p:xfrm>
+          <a:off x="6309360" y="1920240"/>
+          <a:ext cx="5486400" cy="4206240"/>
+        </p:xfrm>
+        <a:graphic>
+          <a:graphicData uri="http://schemas.openxmlformats.org/drawingml/2006/chart">
+            <c:chart xmlns:c="http://schemas.openxmlformats.org/drawingml/2006/chart" r:id="rId3"/>
+          </a:graphicData>
+        </a:graphic>
+      </p:graphicFrame>
+    </p:spTree>
+  </p:cSld>
+  <p:clrMapOvr>
+    <a:masterClrMapping/>
+  </p:clrMapOvr>
+</p:sld>
+</file>
+
+<file path=ppt/slides/slide31.xml><?xml version="1.0" encoding="utf-8"?>
+<p:sld xmlns:a="http://schemas.openxmlformats.org/drawingml/2006/main" xmlns:p="http://schemas.openxmlformats.org/presentationml/2006/main" xmlns:r="http://schemas.openxmlformats.org/officeDocument/2006/relationships">
+  <p:cSld>
+    <p:bg>
+      <p:bgPr>
+        <a:solidFill>
+          <a:srgbClr val="FFFFFF"/>
+        </a:solidFill>
+        <a:effectLst/>
+      </p:bgPr>
+    </p:bg>
+    <p:spTree>
+      <p:nvGrpSpPr>
+        <p:cNvPr id="1" name=""/>
+        <p:cNvGrpSpPr/>
+        <p:nvPr/>
+      </p:nvGrpSpPr>
+      <p:grpSpPr/>
+      <p:sp>
+        <p:nvSpPr>
+          <p:cNvPr id="2" name="Rectangle 1"/>
+          <p:cNvSpPr/>
+          <p:nvPr/>
+        </p:nvSpPr>
+        <p:spPr>
+          <a:xfrm>
+            <a:off x="0" y="0"/>
+            <a:ext cx="12191695" cy="566928"/>
+          </a:xfrm>
+          <a:prstGeom prst="rect">
+            <a:avLst/>
+          </a:prstGeom>
+          <a:solidFill>
+            <a:srgbClr val="EA580C"/>
+          </a:solidFill>
+          <a:ln>
+            <a:noFill/>
+          </a:ln>
+          <a:effectLst/>
+        </p:spPr>
+        <p:style>
+          <a:lnRef idx="1">
+            <a:schemeClr val="accent1"/>
+          </a:lnRef>
+          <a:fillRef idx="3">
+            <a:schemeClr val="accent1"/>
+          </a:fillRef>
+          <a:effectRef idx="2">
+            <a:schemeClr val="accent1"/>
+          </a:effectRef>
+          <a:fontRef idx="minor">
+            <a:schemeClr val="lt1"/>
+          </a:fontRef>
+        </p:style>
+        <p:txBody>
+          <a:bodyPr rtlCol="0" anchor="ctr"/>
+          <a:lstStyle/>
+          <a:p>
+            <a:pPr algn="ctr"/>
+          </a:p>
+        </p:txBody>
+      </p:sp>
+      <p:sp>
+        <p:nvSpPr>
+          <p:cNvPr id="3" name="Rectangle 2"/>
+          <p:cNvSpPr/>
+          <p:nvPr/>
+        </p:nvSpPr>
+        <p:spPr>
+          <a:xfrm>
+            <a:off x="0" y="566928"/>
+            <a:ext cx="12191695" cy="54864"/>
+          </a:xfrm>
+          <a:prstGeom prst="rect">
+            <a:avLst/>
+          </a:prstGeom>
+          <a:solidFill>
+            <a:srgbClr val="FFB020"/>
+          </a:solidFill>
+          <a:ln>
+            <a:noFill/>
+          </a:ln>
+          <a:effectLst/>
+        </p:spPr>
+        <p:style>
+          <a:lnRef idx="1">
+            <a:schemeClr val="accent1"/>
+          </a:lnRef>
+          <a:fillRef idx="3">
+            <a:schemeClr val="accent1"/>
+          </a:fillRef>
+          <a:effectRef idx="2">
+            <a:schemeClr val="accent1"/>
+          </a:effectRef>
+          <a:fontRef idx="minor">
+            <a:schemeClr val="lt1"/>
+          </a:fontRef>
+        </p:style>
+        <p:txBody>
+          <a:bodyPr rtlCol="0" anchor="ctr"/>
+          <a:lstStyle/>
+          <a:p>
+            <a:pPr algn="ctr"/>
+          </a:p>
+        </p:txBody>
+      </p:sp>
+      <p:sp>
+        <p:nvSpPr>
+          <p:cNvPr id="4" name="TextBox 3"/>
+          <p:cNvSpPr txBox="1"/>
+          <p:nvPr/>
+        </p:nvSpPr>
+        <p:spPr>
+          <a:xfrm>
+            <a:off x="365760" y="27432"/>
+            <a:ext cx="7315200" cy="502920"/>
+          </a:xfrm>
+          <a:prstGeom prst="rect">
+            <a:avLst/>
+          </a:prstGeom>
+          <a:noFill/>
+        </p:spPr>
+        <p:txBody>
+          <a:bodyPr wrap="square" anchor="ctr">
+            <a:spAutoFit/>
+          </a:bodyPr>
+          <a:lstStyle/>
+          <a:p>
+            <a:pPr algn="l">
+              <a:lnSpc>
+                <a:spcPct val="100000"/>
+              </a:lnSpc>
+            </a:pPr>
+            <a:r>
+              <a:rPr sz="1500" b="1">
+                <a:solidFill>
+                  <a:srgbClr val="FFFFFF"/>
+                </a:solidFill>
+                <a:latin typeface="Malgun Gothic"/>
+              </a:rPr>
+              <a:t>👩‍🏫 망고아이 교사용 사용설명서</a:t>
+            </a:r>
+          </a:p>
+        </p:txBody>
+      </p:sp>
+      <p:sp>
+        <p:nvSpPr>
+          <p:cNvPr id="5" name="TextBox 4"/>
+          <p:cNvSpPr txBox="1"/>
+          <p:nvPr/>
+        </p:nvSpPr>
+        <p:spPr>
+          <a:xfrm>
+            <a:off x="8168335" y="27432"/>
+            <a:ext cx="3657600" cy="502920"/>
+          </a:xfrm>
+          <a:prstGeom prst="rect">
+            <a:avLst/>
+          </a:prstGeom>
+          <a:noFill/>
+        </p:spPr>
+        <p:txBody>
+          <a:bodyPr wrap="square" anchor="ctr">
+            <a:spAutoFit/>
+          </a:bodyPr>
+          <a:lstStyle/>
+          <a:p>
+            <a:pPr algn="r">
+              <a:lnSpc>
+                <a:spcPct val="100000"/>
+              </a:lnSpc>
+            </a:pPr>
+            <a:r>
+              <a:rPr sz="1300" b="1">
+                <a:solidFill>
+                  <a:srgbClr val="F1F5F9"/>
+                </a:solidFill>
+                <a:latin typeface="Malgun Gothic"/>
+              </a:rPr>
               <a:t>자주 묻는 질문 (FAQ)</a:t>
             </a:r>
           </a:p>
@@ -25652,7 +26695,7 @@
 </p:sld>
 </file>
 
-<file path=ppt/slides/slide31.xml><?xml version="1.0" encoding="utf-8"?>
+<file path=ppt/slides/slide32.xml><?xml version="1.0" encoding="utf-8"?>
 <p:sld xmlns:a="http://schemas.openxmlformats.org/drawingml/2006/main" xmlns:p="http://schemas.openxmlformats.org/presentationml/2006/main" xmlns:r="http://schemas.openxmlformats.org/officeDocument/2006/relationships">
   <p:cSld>
     <p:bg>
@@ -26587,7 +27630,7 @@
 </p:sld>
 </file>
 
-<file path=ppt/slides/slide32.xml><?xml version="1.0" encoding="utf-8"?>
+<file path=ppt/slides/slide33.xml><?xml version="1.0" encoding="utf-8"?>
 <p:sld xmlns:a="http://schemas.openxmlformats.org/drawingml/2006/main" xmlns:p="http://schemas.openxmlformats.org/presentationml/2006/main" xmlns:r="http://schemas.openxmlformats.org/officeDocument/2006/relationships">
   <p:cSld>
     <p:bg>
@@ -28377,7 +29420,7 @@
 </p:sld>
 </file>
 
-<file path=ppt/slides/slide33.xml><?xml version="1.0" encoding="utf-8"?>
+<file path=ppt/slides/slide34.xml><?xml version="1.0" encoding="utf-8"?>
 <p:sld xmlns:a="http://schemas.openxmlformats.org/drawingml/2006/main" xmlns:p="http://schemas.openxmlformats.org/presentationml/2006/main" xmlns:r="http://schemas.openxmlformats.org/officeDocument/2006/relationships">
   <p:cSld>
     <p:bg>

--- a/cloudflare-deploy/public/library/teacher/teacher-kr.pptx
+++ b/cloudflare-deploy/public/library/teacher/teacher-kr.pptx
@@ -4091,7 +4091,7 @@
                 </a:solidFill>
                 <a:latin typeface="Malgun Gothic"/>
               </a:rPr>
-              <a:t>대상 · 화상수업을 진행하는 원어민 강사·한국인 교사   |   test.mangoi.co.kr</a:t>
+              <a:t>대상 · 화상수업을 진행하는 원어민 강사·한국인 교사   |   www.mangoi.co.kr</a:t>
             </a:r>
           </a:p>
         </p:txBody>
@@ -29682,7 +29682,7 @@
                 </a:solidFill>
                 <a:latin typeface="Malgun Gothic"/>
               </a:rPr>
-              <a:t>🌐 test.mangoi.co.kr    📞 1588-0000    ✉ support@mangoi.co.kr</a:t>
+              <a:t>🌐 www.mangoi.co.kr    📞 1644-0561    ✉ support@mangoi.co.kr</a:t>
             </a:r>
           </a:p>
         </p:txBody>

--- a/cloudflare-deploy/public/library/teacher/teacher-kr.pptx
+++ b/cloudflare-deploy/public/library/teacher/teacher-kr.pptx
@@ -6,6 +6,7 @@
   </p:sldMasterIdLst>
   <p:sldIdLst>
     <p:sldId id="256" r:id="rId7"/>
+    <p:sldId id="290" r:id="rId41"/>
     <p:sldId id="257" r:id="rId8"/>
     <p:sldId id="258" r:id="rId9"/>
     <p:sldId id="259" r:id="rId10"/>
@@ -23467,7 +23468,7 @@
         </p:nvSpPr>
         <p:spPr>
           <a:xfrm>
-            <a:off x="365760" y="868680"/>
+            <a:off x="987552" y="868680"/>
             <a:ext cx="9144000" cy="457200"/>
           </a:xfrm>
           <a:prstGeom prst="rect">
@@ -24466,6 +24467,89 @@
           </a:graphicData>
         </a:graphic>
       </p:graphicFrame>
+      <p:sp>
+        <p:nvSpPr>
+          <p:cNvPr id="6" name="Rounded Rectangle 5"/>
+          <p:cNvSpPr/>
+          <p:nvPr/>
+        </p:nvSpPr>
+        <p:spPr>
+          <a:xfrm>
+            <a:off x="365760" y="841247"/>
+            <a:ext cx="475488" cy="475488"/>
+          </a:xfrm>
+          <a:prstGeom prst="roundRect">
+            <a:avLst/>
+          </a:prstGeom>
+          <a:solidFill>
+            <a:srgbClr val="EA580C"/>
+          </a:solidFill>
+          <a:ln>
+            <a:noFill/>
+          </a:ln>
+          <a:effectLst/>
+        </p:spPr>
+        <p:style>
+          <a:lnRef idx="1">
+            <a:schemeClr val="accent1"/>
+          </a:lnRef>
+          <a:fillRef idx="3">
+            <a:schemeClr val="accent1"/>
+          </a:fillRef>
+          <a:effectRef idx="2">
+            <a:schemeClr val="accent1"/>
+          </a:effectRef>
+          <a:fontRef idx="minor">
+            <a:schemeClr val="lt1"/>
+          </a:fontRef>
+        </p:style>
+        <p:txBody>
+          <a:bodyPr rtlCol="0" anchor="ctr"/>
+          <a:lstStyle/>
+          <a:p>
+            <a:pPr algn="ctr"/>
+          </a:p>
+        </p:txBody>
+      </p:sp>
+      <p:sp>
+        <p:nvSpPr>
+          <p:cNvPr id="7" name="TextBox 6"/>
+          <p:cNvSpPr txBox="1"/>
+          <p:nvPr/>
+        </p:nvSpPr>
+        <p:spPr>
+          <a:xfrm>
+            <a:off x="365760" y="841247"/>
+            <a:ext cx="475488" cy="475488"/>
+          </a:xfrm>
+          <a:prstGeom prst="rect">
+            <a:avLst/>
+          </a:prstGeom>
+          <a:noFill/>
+        </p:spPr>
+        <p:txBody>
+          <a:bodyPr wrap="square" anchor="ctr">
+            <a:spAutoFit/>
+          </a:bodyPr>
+          <a:lstStyle/>
+          <a:p>
+            <a:pPr algn="ctr">
+              <a:lnSpc>
+                <a:spcPct val="100000"/>
+              </a:lnSpc>
+            </a:pPr>
+            <a:r>
+              <a:rPr sz="1500" b="1">
+                <a:solidFill>
+                  <a:srgbClr val="FFFFFF"/>
+                </a:solidFill>
+                <a:latin typeface="Malgun Gothic"/>
+              </a:rPr>
+              <a:t>27</a:t>
+            </a:r>
+          </a:p>
+        </p:txBody>
+      </p:sp>
     </p:spTree>
   </p:cSld>
   <p:clrMapOvr>
@@ -25567,7 +25651,7 @@
         </p:nvSpPr>
         <p:spPr>
           <a:xfrm>
-            <a:off x="365760" y="868680"/>
+            <a:off x="987552" y="868680"/>
             <a:ext cx="9144000" cy="457200"/>
           </a:xfrm>
           <a:prstGeom prst="rect">
@@ -25712,6 +25796,89 @@
           </a:graphicData>
         </a:graphic>
       </p:graphicFrame>
+      <p:sp>
+        <p:nvSpPr>
+          <p:cNvPr id="6" name="Rounded Rectangle 5"/>
+          <p:cNvSpPr/>
+          <p:nvPr/>
+        </p:nvSpPr>
+        <p:spPr>
+          <a:xfrm>
+            <a:off x="365760" y="841247"/>
+            <a:ext cx="475488" cy="475488"/>
+          </a:xfrm>
+          <a:prstGeom prst="roundRect">
+            <a:avLst/>
+          </a:prstGeom>
+          <a:solidFill>
+            <a:srgbClr val="EA580C"/>
+          </a:solidFill>
+          <a:ln>
+            <a:noFill/>
+          </a:ln>
+          <a:effectLst/>
+        </p:spPr>
+        <p:style>
+          <a:lnRef idx="1">
+            <a:schemeClr val="accent1"/>
+          </a:lnRef>
+          <a:fillRef idx="3">
+            <a:schemeClr val="accent1"/>
+          </a:fillRef>
+          <a:effectRef idx="2">
+            <a:schemeClr val="accent1"/>
+          </a:effectRef>
+          <a:fontRef idx="minor">
+            <a:schemeClr val="lt1"/>
+          </a:fontRef>
+        </p:style>
+        <p:txBody>
+          <a:bodyPr rtlCol="0" anchor="ctr"/>
+          <a:lstStyle/>
+          <a:p>
+            <a:pPr algn="ctr"/>
+          </a:p>
+        </p:txBody>
+      </p:sp>
+      <p:sp>
+        <p:nvSpPr>
+          <p:cNvPr id="7" name="TextBox 6"/>
+          <p:cNvSpPr txBox="1"/>
+          <p:nvPr/>
+        </p:nvSpPr>
+        <p:spPr>
+          <a:xfrm>
+            <a:off x="365760" y="841247"/>
+            <a:ext cx="475488" cy="475488"/>
+          </a:xfrm>
+          <a:prstGeom prst="rect">
+            <a:avLst/>
+          </a:prstGeom>
+          <a:noFill/>
+        </p:spPr>
+        <p:txBody>
+          <a:bodyPr wrap="square" anchor="ctr">
+            <a:spAutoFit/>
+          </a:bodyPr>
+          <a:lstStyle/>
+          <a:p>
+            <a:pPr algn="ctr">
+              <a:lnSpc>
+                <a:spcPct val="100000"/>
+              </a:lnSpc>
+            </a:pPr>
+            <a:r>
+              <a:rPr sz="1500" b="1">
+                <a:solidFill>
+                  <a:srgbClr val="FFFFFF"/>
+                </a:solidFill>
+                <a:latin typeface="Malgun Gothic"/>
+              </a:rPr>
+              <a:t>28</a:t>
+            </a:r>
+          </a:p>
+        </p:txBody>
+      </p:sp>
     </p:spTree>
   </p:cSld>
   <p:clrMapOvr>
@@ -25912,7 +26079,7 @@
         </p:nvSpPr>
         <p:spPr>
           <a:xfrm>
-            <a:off x="365760" y="868680"/>
+            <a:off x="987552" y="868680"/>
             <a:ext cx="9144000" cy="457200"/>
           </a:xfrm>
           <a:prstGeom prst="rect">
@@ -26683,6 +26850,89 @@
                 <a:latin typeface="Malgun Gothic"/>
               </a:rPr>
               <a:t>A. 게임 학습 리포트에서 학생 ID로 조회하면 자주 틀린 약점 단어를 볼 수 있어요.</a:t>
+            </a:r>
+          </a:p>
+        </p:txBody>
+      </p:sp>
+      <p:sp>
+        <p:nvSpPr>
+          <p:cNvPr id="6" name="Rounded Rectangle 5"/>
+          <p:cNvSpPr/>
+          <p:nvPr/>
+        </p:nvSpPr>
+        <p:spPr>
+          <a:xfrm>
+            <a:off x="365760" y="841247"/>
+            <a:ext cx="475488" cy="475488"/>
+          </a:xfrm>
+          <a:prstGeom prst="roundRect">
+            <a:avLst/>
+          </a:prstGeom>
+          <a:solidFill>
+            <a:srgbClr val="EA580C"/>
+          </a:solidFill>
+          <a:ln>
+            <a:noFill/>
+          </a:ln>
+          <a:effectLst/>
+        </p:spPr>
+        <p:style>
+          <a:lnRef idx="1">
+            <a:schemeClr val="accent1"/>
+          </a:lnRef>
+          <a:fillRef idx="3">
+            <a:schemeClr val="accent1"/>
+          </a:fillRef>
+          <a:effectRef idx="2">
+            <a:schemeClr val="accent1"/>
+          </a:effectRef>
+          <a:fontRef idx="minor">
+            <a:schemeClr val="lt1"/>
+          </a:fontRef>
+        </p:style>
+        <p:txBody>
+          <a:bodyPr rtlCol="0" anchor="ctr"/>
+          <a:lstStyle/>
+          <a:p>
+            <a:pPr algn="ctr"/>
+          </a:p>
+        </p:txBody>
+      </p:sp>
+      <p:sp>
+        <p:nvSpPr>
+          <p:cNvPr id="7" name="TextBox 6"/>
+          <p:cNvSpPr txBox="1"/>
+          <p:nvPr/>
+        </p:nvSpPr>
+        <p:spPr>
+          <a:xfrm>
+            <a:off x="365760" y="841247"/>
+            <a:ext cx="475488" cy="475488"/>
+          </a:xfrm>
+          <a:prstGeom prst="rect">
+            <a:avLst/>
+          </a:prstGeom>
+          <a:noFill/>
+        </p:spPr>
+        <p:txBody>
+          <a:bodyPr wrap="square" anchor="ctr">
+            <a:spAutoFit/>
+          </a:bodyPr>
+          <a:lstStyle/>
+          <a:p>
+            <a:pPr algn="ctr">
+              <a:lnSpc>
+                <a:spcPct val="100000"/>
+              </a:lnSpc>
+            </a:pPr>
+            <a:r>
+              <a:rPr sz="1500" b="1">
+                <a:solidFill>
+                  <a:srgbClr val="FFFFFF"/>
+                </a:solidFill>
+                <a:latin typeface="Malgun Gothic"/>
+              </a:rPr>
+              <a:t>29</a:t>
             </a:r>
           </a:p>
         </p:txBody>
@@ -26887,7 +27137,7 @@
         </p:nvSpPr>
         <p:spPr>
           <a:xfrm>
-            <a:off x="365760" y="868680"/>
+            <a:off x="987552" y="868680"/>
             <a:ext cx="9144000" cy="457200"/>
           </a:xfrm>
           <a:prstGeom prst="rect">
@@ -27622,6 +27872,89 @@
           </a:prstGeom>
         </p:spPr>
       </p:pic>
+      <p:sp>
+        <p:nvSpPr>
+          <p:cNvPr id="6" name="Rounded Rectangle 5"/>
+          <p:cNvSpPr/>
+          <p:nvPr/>
+        </p:nvSpPr>
+        <p:spPr>
+          <a:xfrm>
+            <a:off x="365760" y="841247"/>
+            <a:ext cx="475488" cy="475488"/>
+          </a:xfrm>
+          <a:prstGeom prst="roundRect">
+            <a:avLst/>
+          </a:prstGeom>
+          <a:solidFill>
+            <a:srgbClr val="EA580C"/>
+          </a:solidFill>
+          <a:ln>
+            <a:noFill/>
+          </a:ln>
+          <a:effectLst/>
+        </p:spPr>
+        <p:style>
+          <a:lnRef idx="1">
+            <a:schemeClr val="accent1"/>
+          </a:lnRef>
+          <a:fillRef idx="3">
+            <a:schemeClr val="accent1"/>
+          </a:fillRef>
+          <a:effectRef idx="2">
+            <a:schemeClr val="accent1"/>
+          </a:effectRef>
+          <a:fontRef idx="minor">
+            <a:schemeClr val="lt1"/>
+          </a:fontRef>
+        </p:style>
+        <p:txBody>
+          <a:bodyPr rtlCol="0" anchor="ctr"/>
+          <a:lstStyle/>
+          <a:p>
+            <a:pPr algn="ctr"/>
+          </a:p>
+        </p:txBody>
+      </p:sp>
+      <p:sp>
+        <p:nvSpPr>
+          <p:cNvPr id="7" name="TextBox 6"/>
+          <p:cNvSpPr txBox="1"/>
+          <p:nvPr/>
+        </p:nvSpPr>
+        <p:spPr>
+          <a:xfrm>
+            <a:off x="365760" y="841247"/>
+            <a:ext cx="475488" cy="475488"/>
+          </a:xfrm>
+          <a:prstGeom prst="rect">
+            <a:avLst/>
+          </a:prstGeom>
+          <a:noFill/>
+        </p:spPr>
+        <p:txBody>
+          <a:bodyPr wrap="square" anchor="ctr">
+            <a:spAutoFit/>
+          </a:bodyPr>
+          <a:lstStyle/>
+          <a:p>
+            <a:pPr algn="ctr">
+              <a:lnSpc>
+                <a:spcPct val="100000"/>
+              </a:lnSpc>
+            </a:pPr>
+            <a:r>
+              <a:rPr sz="1500" b="1">
+                <a:solidFill>
+                  <a:srgbClr val="FFFFFF"/>
+                </a:solidFill>
+                <a:latin typeface="Malgun Gothic"/>
+              </a:rPr>
+              <a:t>30</a:t>
+            </a:r>
+          </a:p>
+        </p:txBody>
+      </p:sp>
     </p:spTree>
   </p:cSld>
   <p:clrMapOvr>
@@ -27822,7 +28155,7 @@
         </p:nvSpPr>
         <p:spPr>
           <a:xfrm>
-            <a:off x="365760" y="822960"/>
+            <a:off x="987552" y="822960"/>
             <a:ext cx="11430000" cy="457200"/>
           </a:xfrm>
           <a:prstGeom prst="rect">
@@ -29408,6 +29741,89 @@
                 <a:latin typeface="Malgun Gothic"/>
               </a:rPr>
               <a:t>🍊 선생님의 따뜻한 한마디와 즉각적인 칭찬이 아이의 영어 자신감을 키웁니다. 이 가이드를 곁에 두고 매 수업을 이끌어 주세요. 작은 성취도 놓치지 않고 칭찬하면, 학생은 다음 수업을 기다리게 됩니다. 궁금한 점은 언제든 고객센터로 문의하세요 — 함께 성장하는 수업을 응원합니다! 🍊</a:t>
+            </a:r>
+          </a:p>
+        </p:txBody>
+      </p:sp>
+      <p:sp>
+        <p:nvSpPr>
+          <p:cNvPr id="6" name="Rounded Rectangle 5"/>
+          <p:cNvSpPr/>
+          <p:nvPr/>
+        </p:nvSpPr>
+        <p:spPr>
+          <a:xfrm>
+            <a:off x="365760" y="795528"/>
+            <a:ext cx="475488" cy="475488"/>
+          </a:xfrm>
+          <a:prstGeom prst="roundRect">
+            <a:avLst/>
+          </a:prstGeom>
+          <a:solidFill>
+            <a:srgbClr val="EA580C"/>
+          </a:solidFill>
+          <a:ln>
+            <a:noFill/>
+          </a:ln>
+          <a:effectLst/>
+        </p:spPr>
+        <p:style>
+          <a:lnRef idx="1">
+            <a:schemeClr val="accent1"/>
+          </a:lnRef>
+          <a:fillRef idx="3">
+            <a:schemeClr val="accent1"/>
+          </a:fillRef>
+          <a:effectRef idx="2">
+            <a:schemeClr val="accent1"/>
+          </a:effectRef>
+          <a:fontRef idx="minor">
+            <a:schemeClr val="lt1"/>
+          </a:fontRef>
+        </p:style>
+        <p:txBody>
+          <a:bodyPr rtlCol="0" anchor="ctr"/>
+          <a:lstStyle/>
+          <a:p>
+            <a:pPr algn="ctr"/>
+          </a:p>
+        </p:txBody>
+      </p:sp>
+      <p:sp>
+        <p:nvSpPr>
+          <p:cNvPr id="7" name="TextBox 6"/>
+          <p:cNvSpPr txBox="1"/>
+          <p:nvPr/>
+        </p:nvSpPr>
+        <p:spPr>
+          <a:xfrm>
+            <a:off x="365760" y="795528"/>
+            <a:ext cx="475488" cy="475488"/>
+          </a:xfrm>
+          <a:prstGeom prst="rect">
+            <a:avLst/>
+          </a:prstGeom>
+          <a:noFill/>
+        </p:spPr>
+        <p:txBody>
+          <a:bodyPr wrap="square" anchor="ctr">
+            <a:spAutoFit/>
+          </a:bodyPr>
+          <a:lstStyle/>
+          <a:p>
+            <a:pPr algn="ctr">
+              <a:lnSpc>
+                <a:spcPct val="100000"/>
+              </a:lnSpc>
+            </a:pPr>
+            <a:r>
+              <a:rPr sz="1500" b="1">
+                <a:solidFill>
+                  <a:srgbClr val="FFFFFF"/>
+                </a:solidFill>
+                <a:latin typeface="Malgun Gothic"/>
+              </a:rPr>
+              <a:t>31</a:t>
             </a:r>
           </a:p>
         </p:txBody>
@@ -29683,6 +30099,1358 @@
                 <a:latin typeface="Malgun Gothic"/>
               </a:rPr>
               <a:t>🌐 www.mangoi.co.kr    📞 1644-0561    ✉ support@mangoi.co.kr</a:t>
+            </a:r>
+          </a:p>
+        </p:txBody>
+      </p:sp>
+    </p:spTree>
+  </p:cSld>
+  <p:clrMapOvr>
+    <a:masterClrMapping/>
+  </p:clrMapOvr>
+</p:sld>
+</file>
+
+<file path=ppt/slides/slide35.xml><?xml version="1.0" encoding="utf-8"?>
+<p:sld xmlns:a="http://schemas.openxmlformats.org/drawingml/2006/main" xmlns:p="http://schemas.openxmlformats.org/presentationml/2006/main" xmlns:r="http://schemas.openxmlformats.org/officeDocument/2006/relationships">
+  <p:cSld>
+    <p:spTree>
+      <p:nvGrpSpPr>
+        <p:cNvPr id="1" name=""/>
+        <p:cNvGrpSpPr/>
+        <p:nvPr/>
+      </p:nvGrpSpPr>
+      <p:grpSpPr/>
+      <p:sp>
+        <p:nvSpPr>
+          <p:cNvPr id="2" name="Rectangle 1"/>
+          <p:cNvSpPr/>
+          <p:nvPr/>
+        </p:nvSpPr>
+        <p:spPr>
+          <a:xfrm>
+            <a:off x="0" y="0"/>
+            <a:ext cx="12191695" cy="566928"/>
+          </a:xfrm>
+          <a:prstGeom prst="rect">
+            <a:avLst/>
+          </a:prstGeom>
+          <a:solidFill>
+            <a:srgbClr val="EA580C"/>
+          </a:solidFill>
+          <a:ln>
+            <a:noFill/>
+          </a:ln>
+          <a:effectLst/>
+        </p:spPr>
+        <p:style>
+          <a:lnRef idx="1">
+            <a:schemeClr val="accent1"/>
+          </a:lnRef>
+          <a:fillRef idx="3">
+            <a:schemeClr val="accent1"/>
+          </a:fillRef>
+          <a:effectRef idx="2">
+            <a:schemeClr val="accent1"/>
+          </a:effectRef>
+          <a:fontRef idx="minor">
+            <a:schemeClr val="lt1"/>
+          </a:fontRef>
+        </p:style>
+        <p:txBody>
+          <a:bodyPr rtlCol="0" anchor="ctr"/>
+          <a:lstStyle/>
+          <a:p>
+            <a:pPr algn="ctr"/>
+          </a:p>
+        </p:txBody>
+      </p:sp>
+      <p:sp>
+        <p:nvSpPr>
+          <p:cNvPr id="3" name="Rectangle 2"/>
+          <p:cNvSpPr/>
+          <p:nvPr/>
+        </p:nvSpPr>
+        <p:spPr>
+          <a:xfrm>
+            <a:off x="0" y="566928"/>
+            <a:ext cx="12191695" cy="54864"/>
+          </a:xfrm>
+          <a:prstGeom prst="rect">
+            <a:avLst/>
+          </a:prstGeom>
+          <a:solidFill>
+            <a:srgbClr val="FFB020"/>
+          </a:solidFill>
+          <a:ln>
+            <a:noFill/>
+          </a:ln>
+          <a:effectLst/>
+        </p:spPr>
+        <p:style>
+          <a:lnRef idx="1">
+            <a:schemeClr val="accent1"/>
+          </a:lnRef>
+          <a:fillRef idx="3">
+            <a:schemeClr val="accent1"/>
+          </a:fillRef>
+          <a:effectRef idx="2">
+            <a:schemeClr val="accent1"/>
+          </a:effectRef>
+          <a:fontRef idx="minor">
+            <a:schemeClr val="lt1"/>
+          </a:fontRef>
+        </p:style>
+        <p:txBody>
+          <a:bodyPr rtlCol="0" anchor="ctr"/>
+          <a:lstStyle/>
+          <a:p>
+            <a:pPr algn="ctr"/>
+          </a:p>
+        </p:txBody>
+      </p:sp>
+      <p:sp>
+        <p:nvSpPr>
+          <p:cNvPr id="4" name="TextBox 3"/>
+          <p:cNvSpPr txBox="1"/>
+          <p:nvPr/>
+        </p:nvSpPr>
+        <p:spPr>
+          <a:xfrm>
+            <a:off x="365760" y="27432"/>
+            <a:ext cx="7315200" cy="502920"/>
+          </a:xfrm>
+          <a:prstGeom prst="rect">
+            <a:avLst/>
+          </a:prstGeom>
+          <a:noFill/>
+        </p:spPr>
+        <p:txBody>
+          <a:bodyPr wrap="square" anchor="ctr">
+            <a:spAutoFit/>
+          </a:bodyPr>
+          <a:lstStyle/>
+          <a:p>
+            <a:pPr algn="l">
+              <a:lnSpc>
+                <a:spcPct val="100000"/>
+              </a:lnSpc>
+            </a:pPr>
+            <a:r>
+              <a:rPr sz="1500" b="1">
+                <a:solidFill>
+                  <a:srgbClr val="FFFFFF"/>
+                </a:solidFill>
+                <a:latin typeface="Malgun Gothic"/>
+              </a:rPr>
+              <a:t>👩‍🏫 망고아이 교사용 사용설명서</a:t>
+            </a:r>
+          </a:p>
+        </p:txBody>
+      </p:sp>
+      <p:sp>
+        <p:nvSpPr>
+          <p:cNvPr id="5" name="TextBox 4"/>
+          <p:cNvSpPr txBox="1"/>
+          <p:nvPr/>
+        </p:nvSpPr>
+        <p:spPr>
+          <a:xfrm>
+            <a:off x="8168335" y="27432"/>
+            <a:ext cx="3657600" cy="502920"/>
+          </a:xfrm>
+          <a:prstGeom prst="rect">
+            <a:avLst/>
+          </a:prstGeom>
+          <a:noFill/>
+        </p:spPr>
+        <p:txBody>
+          <a:bodyPr wrap="square" anchor="ctr">
+            <a:spAutoFit/>
+          </a:bodyPr>
+          <a:lstStyle/>
+          <a:p>
+            <a:pPr algn="r">
+              <a:lnSpc>
+                <a:spcPct val="100000"/>
+              </a:lnSpc>
+            </a:pPr>
+            <a:r>
+              <a:rPr sz="1300" b="1">
+                <a:solidFill>
+                  <a:srgbClr val="F1F5F9"/>
+                </a:solidFill>
+                <a:latin typeface="Malgun Gothic"/>
+              </a:rPr>
+              <a:t>차례</a:t>
+            </a:r>
+          </a:p>
+        </p:txBody>
+      </p:sp>
+      <p:sp>
+        <p:nvSpPr>
+          <p:cNvPr id="6" name="TextBox 5"/>
+          <p:cNvSpPr txBox="1"/>
+          <p:nvPr/>
+        </p:nvSpPr>
+        <p:spPr>
+          <a:xfrm>
+            <a:off x="365760" y="749808"/>
+            <a:ext cx="7315200" cy="502920"/>
+          </a:xfrm>
+          <a:prstGeom prst="rect">
+            <a:avLst/>
+          </a:prstGeom>
+          <a:noFill/>
+        </p:spPr>
+        <p:txBody>
+          <a:bodyPr wrap="none">
+            <a:spAutoFit/>
+          </a:bodyPr>
+          <a:lstStyle/>
+          <a:p>
+            <a:r>
+              <a:rPr sz="2200" b="1">
+                <a:solidFill>
+                  <a:srgbClr val="1E2340"/>
+                </a:solidFill>
+                <a:latin typeface="Malgun Gothic"/>
+              </a:rPr>
+              <a:t>📑 차례</a:t>
+            </a:r>
+          </a:p>
+        </p:txBody>
+      </p:sp>
+      <p:sp>
+        <p:nvSpPr>
+          <p:cNvPr id="7" name="TextBox 6"/>
+          <p:cNvSpPr txBox="1"/>
+          <p:nvPr/>
+        </p:nvSpPr>
+        <p:spPr>
+          <a:xfrm>
+            <a:off x="365760" y="1417320"/>
+            <a:ext cx="5500116" cy="5212080"/>
+          </a:xfrm>
+          <a:prstGeom prst="rect">
+            <a:avLst/>
+          </a:prstGeom>
+          <a:noFill/>
+        </p:spPr>
+        <p:txBody>
+          <a:bodyPr wrap="none">
+            <a:spAutoFit/>
+          </a:bodyPr>
+          <a:lstStyle/>
+          <a:p>
+            <a:pPr>
+              <a:spcAft>
+                <a:spcPts val="1080"/>
+              </a:spcAft>
+            </a:pPr>
+            <a:r>
+              <a:rPr sz="1100" b="1">
+                <a:solidFill>
+                  <a:srgbClr val="4F46E5"/>
+                </a:solidFill>
+                <a:latin typeface="Malgun Gothic"/>
+              </a:rPr>
+              <a:t>·   </a:t>
+            </a:r>
+            <a:r>
+              <a:rPr sz="1100">
+                <a:solidFill>
+                  <a:srgbClr val="334155"/>
+                </a:solidFill>
+                <a:latin typeface="Malgun Gothic"/>
+              </a:rPr>
+              <a:t>소개</a:t>
+            </a:r>
+            <a:r>
+              <a:rPr sz="950">
+                <a:solidFill>
+                  <a:srgbClr val="94A3B8"/>
+                </a:solidFill>
+                <a:latin typeface="Malgun Gothic"/>
+              </a:rPr>
+              <a:t>   ·  p.3</a:t>
+            </a:r>
+          </a:p>
+          <a:p>
+            <a:pPr>
+              <a:spcAft>
+                <a:spcPts val="1080"/>
+              </a:spcAft>
+            </a:pPr>
+            <a:r>
+              <a:rPr sz="1100" b="1">
+                <a:solidFill>
+                  <a:srgbClr val="4F46E5"/>
+                </a:solidFill>
+                <a:latin typeface="Malgun Gothic"/>
+              </a:rPr>
+              <a:t>01  </a:t>
+            </a:r>
+            <a:r>
+              <a:rPr sz="1100">
+                <a:solidFill>
+                  <a:srgbClr val="334155"/>
+                </a:solidFill>
+                <a:latin typeface="Malgun Gothic"/>
+              </a:rPr>
+              <a:t>🩺 수업 전 정밀 점검</a:t>
+            </a:r>
+            <a:r>
+              <a:rPr sz="950">
+                <a:solidFill>
+                  <a:srgbClr val="94A3B8"/>
+                </a:solidFill>
+                <a:latin typeface="Malgun Gothic"/>
+              </a:rPr>
+              <a:t>   ·  p.4</a:t>
+            </a:r>
+          </a:p>
+          <a:p>
+            <a:pPr>
+              <a:spcAft>
+                <a:spcPts val="1080"/>
+              </a:spcAft>
+            </a:pPr>
+            <a:r>
+              <a:rPr sz="1100" b="1">
+                <a:solidFill>
+                  <a:srgbClr val="4F46E5"/>
+                </a:solidFill>
+                <a:latin typeface="Malgun Gothic"/>
+              </a:rPr>
+              <a:t>02  </a:t>
+            </a:r>
+            <a:r>
+              <a:rPr sz="1100">
+                <a:solidFill>
+                  <a:srgbClr val="334155"/>
+                </a:solidFill>
+                <a:latin typeface="Malgun Gothic"/>
+              </a:rPr>
+              <a:t>👤 마이페이지에서 수업 입장</a:t>
+            </a:r>
+            <a:r>
+              <a:rPr sz="950">
+                <a:solidFill>
+                  <a:srgbClr val="94A3B8"/>
+                </a:solidFill>
+                <a:latin typeface="Malgun Gothic"/>
+              </a:rPr>
+              <a:t>   ·  p.5</a:t>
+            </a:r>
+          </a:p>
+          <a:p>
+            <a:pPr>
+              <a:spcAft>
+                <a:spcPts val="1080"/>
+              </a:spcAft>
+            </a:pPr>
+            <a:r>
+              <a:rPr sz="1100" b="1">
+                <a:solidFill>
+                  <a:srgbClr val="4F46E5"/>
+                </a:solidFill>
+                <a:latin typeface="Malgun Gothic"/>
+              </a:rPr>
+              <a:t>03  </a:t>
+            </a:r>
+            <a:r>
+              <a:rPr sz="1100">
+                <a:solidFill>
+                  <a:srgbClr val="334155"/>
+                </a:solidFill>
+                <a:latin typeface="Malgun Gothic"/>
+              </a:rPr>
+              <a:t>🧭 마이페이지 메뉴 100% 활용</a:t>
+            </a:r>
+            <a:r>
+              <a:rPr sz="950">
+                <a:solidFill>
+                  <a:srgbClr val="94A3B8"/>
+                </a:solidFill>
+                <a:latin typeface="Malgun Gothic"/>
+              </a:rPr>
+              <a:t>   ·  p.6</a:t>
+            </a:r>
+          </a:p>
+          <a:p>
+            <a:pPr>
+              <a:spcAft>
+                <a:spcPts val="1080"/>
+              </a:spcAft>
+            </a:pPr>
+            <a:r>
+              <a:rPr sz="1100" b="1">
+                <a:solidFill>
+                  <a:srgbClr val="4F46E5"/>
+                </a:solidFill>
+                <a:latin typeface="Malgun Gothic"/>
+              </a:rPr>
+              <a:t>04  </a:t>
+            </a:r>
+            <a:r>
+              <a:rPr sz="1100">
+                <a:solidFill>
+                  <a:srgbClr val="334155"/>
+                </a:solidFill>
+                <a:latin typeface="Malgun Gothic"/>
+              </a:rPr>
+              <a:t>🎥 화상교실 입장하기</a:t>
+            </a:r>
+            <a:r>
+              <a:rPr sz="950">
+                <a:solidFill>
+                  <a:srgbClr val="94A3B8"/>
+                </a:solidFill>
+                <a:latin typeface="Malgun Gothic"/>
+              </a:rPr>
+              <a:t>   ·  p.7</a:t>
+            </a:r>
+          </a:p>
+          <a:p>
+            <a:pPr>
+              <a:spcAft>
+                <a:spcPts val="1080"/>
+              </a:spcAft>
+            </a:pPr>
+            <a:r>
+              <a:rPr sz="1100" b="1">
+                <a:solidFill>
+                  <a:srgbClr val="4F46E5"/>
+                </a:solidFill>
+                <a:latin typeface="Malgun Gothic"/>
+              </a:rPr>
+              <a:t>05  </a:t>
+            </a:r>
+            <a:r>
+              <a:rPr sz="1100">
+                <a:solidFill>
+                  <a:srgbClr val="334155"/>
+                </a:solidFill>
+                <a:latin typeface="Malgun Gothic"/>
+              </a:rPr>
+              <a:t>🖥️ 교실 화면 한눈에 보기</a:t>
+            </a:r>
+            <a:r>
+              <a:rPr sz="950">
+                <a:solidFill>
+                  <a:srgbClr val="94A3B8"/>
+                </a:solidFill>
+                <a:latin typeface="Malgun Gothic"/>
+              </a:rPr>
+              <a:t>   ·  p.8</a:t>
+            </a:r>
+          </a:p>
+          <a:p>
+            <a:pPr>
+              <a:spcAft>
+                <a:spcPts val="1080"/>
+              </a:spcAft>
+            </a:pPr>
+            <a:r>
+              <a:rPr sz="1100" b="1">
+                <a:solidFill>
+                  <a:srgbClr val="4F46E5"/>
+                </a:solidFill>
+                <a:latin typeface="Malgun Gothic"/>
+              </a:rPr>
+              <a:t>06  </a:t>
+            </a:r>
+            <a:r>
+              <a:rPr sz="1100">
+                <a:solidFill>
+                  <a:srgbClr val="334155"/>
+                </a:solidFill>
+                <a:latin typeface="Malgun Gothic"/>
+              </a:rPr>
+              <a:t>🗂️ 상단 탭 6가지 바꾸기</a:t>
+            </a:r>
+            <a:r>
+              <a:rPr sz="950">
+                <a:solidFill>
+                  <a:srgbClr val="94A3B8"/>
+                </a:solidFill>
+                <a:latin typeface="Malgun Gothic"/>
+              </a:rPr>
+              <a:t>   ·  p.9</a:t>
+            </a:r>
+          </a:p>
+          <a:p>
+            <a:pPr>
+              <a:spcAft>
+                <a:spcPts val="1080"/>
+              </a:spcAft>
+            </a:pPr>
+            <a:r>
+              <a:rPr sz="1100" b="1">
+                <a:solidFill>
+                  <a:srgbClr val="4F46E5"/>
+                </a:solidFill>
+                <a:latin typeface="Malgun Gothic"/>
+              </a:rPr>
+              <a:t>07  </a:t>
+            </a:r>
+            <a:r>
+              <a:rPr sz="1100">
+                <a:solidFill>
+                  <a:srgbClr val="334155"/>
+                </a:solidFill>
+                <a:latin typeface="Malgun Gothic"/>
+              </a:rPr>
+              <a:t>🖊️ 칠판 도구 하나하나</a:t>
+            </a:r>
+            <a:r>
+              <a:rPr sz="950">
+                <a:solidFill>
+                  <a:srgbClr val="94A3B8"/>
+                </a:solidFill>
+                <a:latin typeface="Malgun Gothic"/>
+              </a:rPr>
+              <a:t>   ·  p.10</a:t>
+            </a:r>
+          </a:p>
+          <a:p>
+            <a:pPr>
+              <a:spcAft>
+                <a:spcPts val="1080"/>
+              </a:spcAft>
+            </a:pPr>
+            <a:r>
+              <a:rPr sz="1100" b="1">
+                <a:solidFill>
+                  <a:srgbClr val="4F46E5"/>
+                </a:solidFill>
+                <a:latin typeface="Malgun Gothic"/>
+              </a:rPr>
+              <a:t>08  </a:t>
+            </a:r>
+            <a:r>
+              <a:rPr sz="1100">
+                <a:solidFill>
+                  <a:srgbClr val="334155"/>
+                </a:solidFill>
+                <a:latin typeface="Malgun Gothic"/>
+              </a:rPr>
+              <a:t>📚 교재도구 (PDF·사진 공유)</a:t>
+            </a:r>
+            <a:r>
+              <a:rPr sz="950">
+                <a:solidFill>
+                  <a:srgbClr val="94A3B8"/>
+                </a:solidFill>
+                <a:latin typeface="Malgun Gothic"/>
+              </a:rPr>
+              <a:t>   ·  p.11</a:t>
+            </a:r>
+          </a:p>
+          <a:p>
+            <a:pPr>
+              <a:spcAft>
+                <a:spcPts val="1080"/>
+              </a:spcAft>
+            </a:pPr>
+            <a:r>
+              <a:rPr sz="1100" b="1">
+                <a:solidFill>
+                  <a:srgbClr val="4F46E5"/>
+                </a:solidFill>
+                <a:latin typeface="Malgun Gothic"/>
+              </a:rPr>
+              <a:t>09  </a:t>
+            </a:r>
+            <a:r>
+              <a:rPr sz="1100">
+                <a:solidFill>
+                  <a:srgbClr val="334155"/>
+                </a:solidFill>
+                <a:latin typeface="Malgun Gothic"/>
+              </a:rPr>
+              <a:t>✍️ 필기도구 (교재 위에 쓰기)</a:t>
+            </a:r>
+            <a:r>
+              <a:rPr sz="950">
+                <a:solidFill>
+                  <a:srgbClr val="94A3B8"/>
+                </a:solidFill>
+                <a:latin typeface="Malgun Gothic"/>
+              </a:rPr>
+              <a:t>   ·  p.12</a:t>
+            </a:r>
+          </a:p>
+          <a:p>
+            <a:pPr>
+              <a:spcAft>
+                <a:spcPts val="1080"/>
+              </a:spcAft>
+            </a:pPr>
+            <a:r>
+              <a:rPr sz="1100" b="1">
+                <a:solidFill>
+                  <a:srgbClr val="4F46E5"/>
+                </a:solidFill>
+                <a:latin typeface="Malgun Gothic"/>
+              </a:rPr>
+              <a:t>10  </a:t>
+            </a:r>
+            <a:r>
+              <a:rPr sz="1100">
+                <a:solidFill>
+                  <a:srgbClr val="334155"/>
+                </a:solidFill>
+                <a:latin typeface="Malgun Gothic"/>
+              </a:rPr>
+              <a:t>📹 동영상 함께 보기</a:t>
+            </a:r>
+            <a:r>
+              <a:rPr sz="950">
+                <a:solidFill>
+                  <a:srgbClr val="94A3B8"/>
+                </a:solidFill>
+                <a:latin typeface="Malgun Gothic"/>
+              </a:rPr>
+              <a:t>   ·  p.13</a:t>
+            </a:r>
+          </a:p>
+          <a:p>
+            <a:pPr>
+              <a:spcAft>
+                <a:spcPts val="1080"/>
+              </a:spcAft>
+            </a:pPr>
+            <a:r>
+              <a:rPr sz="1100" b="1">
+                <a:solidFill>
+                  <a:srgbClr val="4F46E5"/>
+                </a:solidFill>
+                <a:latin typeface="Malgun Gothic"/>
+              </a:rPr>
+              <a:t>11  </a:t>
+            </a:r>
+            <a:r>
+              <a:rPr sz="1100">
+                <a:solidFill>
+                  <a:srgbClr val="334155"/>
+                </a:solidFill>
+                <a:latin typeface="Malgun Gothic"/>
+              </a:rPr>
+              <a:t>🎨 배경화면 &amp; 얼굴 꾸미기</a:t>
+            </a:r>
+            <a:r>
+              <a:rPr sz="950">
+                <a:solidFill>
+                  <a:srgbClr val="94A3B8"/>
+                </a:solidFill>
+                <a:latin typeface="Malgun Gothic"/>
+              </a:rPr>
+              <a:t>   ·  p.14</a:t>
+            </a:r>
+          </a:p>
+          <a:p>
+            <a:pPr>
+              <a:spcAft>
+                <a:spcPts val="1080"/>
+              </a:spcAft>
+            </a:pPr>
+            <a:r>
+              <a:rPr sz="1100" b="1">
+                <a:solidFill>
+                  <a:srgbClr val="4F46E5"/>
+                </a:solidFill>
+                <a:latin typeface="Malgun Gothic"/>
+              </a:rPr>
+              <a:t>12  </a:t>
+            </a:r>
+            <a:r>
+              <a:rPr sz="1100">
+                <a:solidFill>
+                  <a:srgbClr val="334155"/>
+                </a:solidFill>
+                <a:latin typeface="Malgun Gothic"/>
+              </a:rPr>
+              <a:t>🔲 화면 크기·배치 바꾸기</a:t>
+            </a:r>
+            <a:r>
+              <a:rPr sz="950">
+                <a:solidFill>
+                  <a:srgbClr val="94A3B8"/>
+                </a:solidFill>
+                <a:latin typeface="Malgun Gothic"/>
+              </a:rPr>
+              <a:t>   ·  p.15</a:t>
+            </a:r>
+          </a:p>
+          <a:p>
+            <a:pPr>
+              <a:spcAft>
+                <a:spcPts val="1080"/>
+              </a:spcAft>
+            </a:pPr>
+            <a:r>
+              <a:rPr sz="1100" b="1">
+                <a:solidFill>
+                  <a:srgbClr val="4F46E5"/>
+                </a:solidFill>
+                <a:latin typeface="Malgun Gothic"/>
+              </a:rPr>
+              <a:t>13  </a:t>
+            </a:r>
+            <a:r>
+              <a:rPr sz="1100">
+                <a:solidFill>
+                  <a:srgbClr val="334155"/>
+                </a:solidFill>
+                <a:latin typeface="Malgun Gothic"/>
+              </a:rPr>
+              <a:t>🌟 수업 중 칭찬 포인트</a:t>
+            </a:r>
+            <a:r>
+              <a:rPr sz="950">
+                <a:solidFill>
+                  <a:srgbClr val="94A3B8"/>
+                </a:solidFill>
+                <a:latin typeface="Malgun Gothic"/>
+              </a:rPr>
+              <a:t>   ·  p.16</a:t>
+            </a:r>
+          </a:p>
+          <a:p>
+            <a:pPr>
+              <a:spcAft>
+                <a:spcPts val="1080"/>
+              </a:spcAft>
+            </a:pPr>
+            <a:r>
+              <a:rPr sz="1100" b="1">
+                <a:solidFill>
+                  <a:srgbClr val="4F46E5"/>
+                </a:solidFill>
+                <a:latin typeface="Malgun Gothic"/>
+              </a:rPr>
+              <a:t>14  </a:t>
+            </a:r>
+            <a:r>
+              <a:rPr sz="1100">
+                <a:solidFill>
+                  <a:srgbClr val="334155"/>
+                </a:solidFill>
+                <a:latin typeface="Malgun Gothic"/>
+              </a:rPr>
+              <a:t>🎛️ 하단 독 &amp; 칭찬 바구니</a:t>
+            </a:r>
+            <a:r>
+              <a:rPr sz="950">
+                <a:solidFill>
+                  <a:srgbClr val="94A3B8"/>
+                </a:solidFill>
+                <a:latin typeface="Malgun Gothic"/>
+              </a:rPr>
+              <a:t>   ·  p.17</a:t>
+            </a:r>
+          </a:p>
+          <a:p>
+            <a:pPr>
+              <a:spcAft>
+                <a:spcPts val="1080"/>
+              </a:spcAft>
+            </a:pPr>
+            <a:r>
+              <a:rPr sz="1100" b="1">
+                <a:solidFill>
+                  <a:srgbClr val="4F46E5"/>
+                </a:solidFill>
+                <a:latin typeface="Malgun Gothic"/>
+              </a:rPr>
+              <a:t>15  </a:t>
+            </a:r>
+            <a:r>
+              <a:rPr sz="1100">
+                <a:solidFill>
+                  <a:srgbClr val="334155"/>
+                </a:solidFill>
+                <a:latin typeface="Malgun Gothic"/>
+              </a:rPr>
+              <a:t>📤 교재 사전 업로드</a:t>
+            </a:r>
+            <a:r>
+              <a:rPr sz="950">
+                <a:solidFill>
+                  <a:srgbClr val="94A3B8"/>
+                </a:solidFill>
+                <a:latin typeface="Malgun Gothic"/>
+              </a:rPr>
+              <a:t>   ·  p.18</a:t>
+            </a:r>
+          </a:p>
+        </p:txBody>
+      </p:sp>
+      <p:sp>
+        <p:nvSpPr>
+          <p:cNvPr id="8" name="TextBox 7"/>
+          <p:cNvSpPr txBox="1"/>
+          <p:nvPr/>
+        </p:nvSpPr>
+        <p:spPr>
+          <a:xfrm>
+            <a:off x="6094476" y="1417320"/>
+            <a:ext cx="5500116" cy="5212080"/>
+          </a:xfrm>
+          <a:prstGeom prst="rect">
+            <a:avLst/>
+          </a:prstGeom>
+          <a:noFill/>
+        </p:spPr>
+        <p:txBody>
+          <a:bodyPr wrap="none">
+            <a:spAutoFit/>
+          </a:bodyPr>
+          <a:lstStyle/>
+          <a:p>
+            <a:pPr>
+              <a:spcAft>
+                <a:spcPts val="1080"/>
+              </a:spcAft>
+            </a:pPr>
+            <a:r>
+              <a:rPr sz="1100" b="1">
+                <a:solidFill>
+                  <a:srgbClr val="4F46E5"/>
+                </a:solidFill>
+                <a:latin typeface="Malgun Gothic"/>
+              </a:rPr>
+              <a:t>16  </a:t>
+            </a:r>
+            <a:r>
+              <a:rPr sz="1100">
+                <a:solidFill>
+                  <a:srgbClr val="334155"/>
+                </a:solidFill>
+                <a:latin typeface="Malgun Gothic"/>
+              </a:rPr>
+              <a:t>🔥 AI 웜업으로 시작</a:t>
+            </a:r>
+            <a:r>
+              <a:rPr sz="950">
+                <a:solidFill>
+                  <a:srgbClr val="94A3B8"/>
+                </a:solidFill>
+                <a:latin typeface="Malgun Gothic"/>
+              </a:rPr>
+              <a:t>   ·  p.19</a:t>
+            </a:r>
+          </a:p>
+          <a:p>
+            <a:pPr>
+              <a:spcAft>
+                <a:spcPts val="1080"/>
+              </a:spcAft>
+            </a:pPr>
+            <a:r>
+              <a:rPr sz="1100" b="1">
+                <a:solidFill>
+                  <a:srgbClr val="4F46E5"/>
+                </a:solidFill>
+                <a:latin typeface="Malgun Gothic"/>
+              </a:rPr>
+              <a:t>17  </a:t>
+            </a:r>
+            <a:r>
+              <a:rPr sz="1100">
+                <a:solidFill>
+                  <a:srgbClr val="334155"/>
+                </a:solidFill>
+                <a:latin typeface="Malgun Gothic"/>
+              </a:rPr>
+              <a:t>🎙️ 발음 코치 활용</a:t>
+            </a:r>
+            <a:r>
+              <a:rPr sz="950">
+                <a:solidFill>
+                  <a:srgbClr val="94A3B8"/>
+                </a:solidFill>
+                <a:latin typeface="Malgun Gothic"/>
+              </a:rPr>
+              <a:t>   ·  p.20</a:t>
+            </a:r>
+          </a:p>
+          <a:p>
+            <a:pPr>
+              <a:spcAft>
+                <a:spcPts val="1080"/>
+              </a:spcAft>
+            </a:pPr>
+            <a:r>
+              <a:rPr sz="1100" b="1">
+                <a:solidFill>
+                  <a:srgbClr val="4F46E5"/>
+                </a:solidFill>
+                <a:latin typeface="Malgun Gothic"/>
+              </a:rPr>
+              <a:t>18  </a:t>
+            </a:r>
+            <a:r>
+              <a:rPr sz="1100">
+                <a:solidFill>
+                  <a:srgbClr val="334155"/>
+                </a:solidFill>
+                <a:latin typeface="Malgun Gothic"/>
+              </a:rPr>
+              <a:t>📝 수업 평가서 작성</a:t>
+            </a:r>
+            <a:r>
+              <a:rPr sz="950">
+                <a:solidFill>
+                  <a:srgbClr val="94A3B8"/>
+                </a:solidFill>
+                <a:latin typeface="Malgun Gothic"/>
+              </a:rPr>
+              <a:t>   ·  p.21</a:t>
+            </a:r>
+          </a:p>
+          <a:p>
+            <a:pPr>
+              <a:spcAft>
+                <a:spcPts val="1080"/>
+              </a:spcAft>
+            </a:pPr>
+            <a:r>
+              <a:rPr sz="1100" b="1">
+                <a:solidFill>
+                  <a:srgbClr val="4F46E5"/>
+                </a:solidFill>
+                <a:latin typeface="Malgun Gothic"/>
+              </a:rPr>
+              <a:t>19  </a:t>
+            </a:r>
+            <a:r>
+              <a:rPr sz="1100">
+                <a:solidFill>
+                  <a:srgbClr val="334155"/>
+                </a:solidFill>
+                <a:latin typeface="Malgun Gothic"/>
+              </a:rPr>
+              <a:t>🌟 학생 칭찬 남기기</a:t>
+            </a:r>
+            <a:r>
+              <a:rPr sz="950">
+                <a:solidFill>
+                  <a:srgbClr val="94A3B8"/>
+                </a:solidFill>
+                <a:latin typeface="Malgun Gothic"/>
+              </a:rPr>
+              <a:t>   ·  p.22</a:t>
+            </a:r>
+          </a:p>
+          <a:p>
+            <a:pPr>
+              <a:spcAft>
+                <a:spcPts val="1080"/>
+              </a:spcAft>
+            </a:pPr>
+            <a:r>
+              <a:rPr sz="1100" b="1">
+                <a:solidFill>
+                  <a:srgbClr val="4F46E5"/>
+                </a:solidFill>
+                <a:latin typeface="Malgun Gothic"/>
+              </a:rPr>
+              <a:t>20  </a:t>
+            </a:r>
+            <a:r>
+              <a:rPr sz="1100">
+                <a:solidFill>
+                  <a:srgbClr val="334155"/>
+                </a:solidFill>
+                <a:latin typeface="Malgun Gothic"/>
+              </a:rPr>
+              <a:t>🧠 게임 학습 리포트</a:t>
+            </a:r>
+            <a:r>
+              <a:rPr sz="950">
+                <a:solidFill>
+                  <a:srgbClr val="94A3B8"/>
+                </a:solidFill>
+                <a:latin typeface="Malgun Gothic"/>
+              </a:rPr>
+              <a:t>   ·  p.23</a:t>
+            </a:r>
+          </a:p>
+          <a:p>
+            <a:pPr>
+              <a:spcAft>
+                <a:spcPts val="1080"/>
+              </a:spcAft>
+            </a:pPr>
+            <a:r>
+              <a:rPr sz="1100" b="1">
+                <a:solidFill>
+                  <a:srgbClr val="4F46E5"/>
+                </a:solidFill>
+                <a:latin typeface="Malgun Gothic"/>
+              </a:rPr>
+              <a:t>21  </a:t>
+            </a:r>
+            <a:r>
+              <a:rPr sz="1100">
+                <a:solidFill>
+                  <a:srgbClr val="334155"/>
+                </a:solidFill>
+                <a:latin typeface="Malgun Gothic"/>
+              </a:rPr>
+              <a:t>📄 학습 리포트 · 레슨 관리</a:t>
+            </a:r>
+            <a:r>
+              <a:rPr sz="950">
+                <a:solidFill>
+                  <a:srgbClr val="94A3B8"/>
+                </a:solidFill>
+                <a:latin typeface="Malgun Gothic"/>
+              </a:rPr>
+              <a:t>   ·  p.24</a:t>
+            </a:r>
+          </a:p>
+          <a:p>
+            <a:pPr>
+              <a:spcAft>
+                <a:spcPts val="1080"/>
+              </a:spcAft>
+            </a:pPr>
+            <a:r>
+              <a:rPr sz="1100" b="1">
+                <a:solidFill>
+                  <a:srgbClr val="4F46E5"/>
+                </a:solidFill>
+                <a:latin typeface="Malgun Gothic"/>
+              </a:rPr>
+              <a:t>22  </a:t>
+            </a:r>
+            <a:r>
+              <a:rPr sz="1100">
+                <a:solidFill>
+                  <a:srgbClr val="334155"/>
+                </a:solidFill>
+                <a:latin typeface="Malgun Gothic"/>
+              </a:rPr>
+              <a:t>🔄 수업 연기 처리</a:t>
+            </a:r>
+            <a:r>
+              <a:rPr sz="950">
+                <a:solidFill>
+                  <a:srgbClr val="94A3B8"/>
+                </a:solidFill>
+                <a:latin typeface="Malgun Gothic"/>
+              </a:rPr>
+              <a:t>   ·  p.25</a:t>
+            </a:r>
+          </a:p>
+          <a:p>
+            <a:pPr>
+              <a:spcAft>
+                <a:spcPts val="1080"/>
+              </a:spcAft>
+            </a:pPr>
+            <a:r>
+              <a:rPr sz="1100" b="1">
+                <a:solidFill>
+                  <a:srgbClr val="4F46E5"/>
+                </a:solidFill>
+                <a:latin typeface="Malgun Gothic"/>
+              </a:rPr>
+              <a:t>23  </a:t>
+            </a:r>
+            <a:r>
+              <a:rPr sz="1100">
+                <a:solidFill>
+                  <a:srgbClr val="334155"/>
+                </a:solidFill>
+                <a:latin typeface="Malgun Gothic"/>
+              </a:rPr>
+              <a:t>🎧 지원 · 문의</a:t>
+            </a:r>
+            <a:r>
+              <a:rPr sz="950">
+                <a:solidFill>
+                  <a:srgbClr val="94A3B8"/>
+                </a:solidFill>
+                <a:latin typeface="Malgun Gothic"/>
+              </a:rPr>
+              <a:t>   ·  p.26</a:t>
+            </a:r>
+          </a:p>
+          <a:p>
+            <a:pPr>
+              <a:spcAft>
+                <a:spcPts val="1080"/>
+              </a:spcAft>
+            </a:pPr>
+            <a:r>
+              <a:rPr sz="1100" b="1">
+                <a:solidFill>
+                  <a:srgbClr val="4F46E5"/>
+                </a:solidFill>
+                <a:latin typeface="Malgun Gothic"/>
+              </a:rPr>
+              <a:t>24  </a:t>
+            </a:r>
+            <a:r>
+              <a:rPr sz="1100">
+                <a:solidFill>
+                  <a:srgbClr val="334155"/>
+                </a:solidFill>
+                <a:latin typeface="Malgun Gothic"/>
+              </a:rPr>
+              <a:t>🕐 한국·필리핀 듀얼 시계</a:t>
+            </a:r>
+            <a:r>
+              <a:rPr sz="950">
+                <a:solidFill>
+                  <a:srgbClr val="94A3B8"/>
+                </a:solidFill>
+                <a:latin typeface="Malgun Gothic"/>
+              </a:rPr>
+              <a:t>   ·  p.27</a:t>
+            </a:r>
+          </a:p>
+          <a:p>
+            <a:pPr>
+              <a:spcAft>
+                <a:spcPts val="1080"/>
+              </a:spcAft>
+            </a:pPr>
+            <a:r>
+              <a:rPr sz="1100" b="1">
+                <a:solidFill>
+                  <a:srgbClr val="4F46E5"/>
+                </a:solidFill>
+                <a:latin typeface="Malgun Gothic"/>
+              </a:rPr>
+              <a:t>25  </a:t>
+            </a:r>
+            <a:r>
+              <a:rPr sz="1100">
+                <a:solidFill>
+                  <a:srgbClr val="334155"/>
+                </a:solidFill>
+                <a:latin typeface="Malgun Gothic"/>
+              </a:rPr>
+              <a:t>🇨🇳 중국어 발음 코치</a:t>
+            </a:r>
+            <a:r>
+              <a:rPr sz="950">
+                <a:solidFill>
+                  <a:srgbClr val="94A3B8"/>
+                </a:solidFill>
+                <a:latin typeface="Malgun Gothic"/>
+              </a:rPr>
+              <a:t>   ·  p.28</a:t>
+            </a:r>
+          </a:p>
+          <a:p>
+            <a:pPr>
+              <a:spcAft>
+                <a:spcPts val="1080"/>
+              </a:spcAft>
+            </a:pPr>
+            <a:r>
+              <a:rPr sz="1100" b="1">
+                <a:solidFill>
+                  <a:srgbClr val="4F46E5"/>
+                </a:solidFill>
+                <a:latin typeface="Malgun Gothic"/>
+              </a:rPr>
+              <a:t>26  </a:t>
+            </a:r>
+            <a:r>
+              <a:rPr sz="1100">
+                <a:solidFill>
+                  <a:srgbClr val="334155"/>
+                </a:solidFill>
+                <a:latin typeface="Malgun Gothic"/>
+              </a:rPr>
+              <a:t>🤖 수업 종료 후 AI 코칭</a:t>
+            </a:r>
+            <a:r>
+              <a:rPr sz="950">
+                <a:solidFill>
+                  <a:srgbClr val="94A3B8"/>
+                </a:solidFill>
+                <a:latin typeface="Malgun Gothic"/>
+              </a:rPr>
+              <a:t>   ·  p.29</a:t>
+            </a:r>
+          </a:p>
+          <a:p>
+            <a:pPr>
+              <a:spcAft>
+                <a:spcPts val="1080"/>
+              </a:spcAft>
+            </a:pPr>
+            <a:r>
+              <a:rPr sz="1100" b="1">
+                <a:solidFill>
+                  <a:srgbClr val="4F46E5"/>
+                </a:solidFill>
+                <a:latin typeface="Malgun Gothic"/>
+              </a:rPr>
+              <a:t>27  </a:t>
+            </a:r>
+            <a:r>
+              <a:rPr sz="1100">
+                <a:solidFill>
+                  <a:srgbClr val="334155"/>
+                </a:solidFill>
+                <a:latin typeface="Malgun Gothic"/>
+              </a:rPr>
+              <a:t>수업 흐름별 사용 도구</a:t>
+            </a:r>
+            <a:r>
+              <a:rPr sz="950">
+                <a:solidFill>
+                  <a:srgbClr val="94A3B8"/>
+                </a:solidFill>
+                <a:latin typeface="Malgun Gothic"/>
+              </a:rPr>
+              <a:t>   ·  p.30</a:t>
+            </a:r>
+          </a:p>
+          <a:p>
+            <a:pPr>
+              <a:spcAft>
+                <a:spcPts val="1080"/>
+              </a:spcAft>
+            </a:pPr>
+            <a:r>
+              <a:rPr sz="1100" b="1">
+                <a:solidFill>
+                  <a:srgbClr val="4F46E5"/>
+                </a:solidFill>
+                <a:latin typeface="Malgun Gothic"/>
+              </a:rPr>
+              <a:t>28  </a:t>
+            </a:r>
+            <a:r>
+              <a:rPr sz="1100">
+                <a:solidFill>
+                  <a:srgbClr val="334155"/>
+                </a:solidFill>
+                <a:latin typeface="Malgun Gothic"/>
+              </a:rPr>
+              <a:t>한눈에 보는 데이터</a:t>
+            </a:r>
+            <a:r>
+              <a:rPr sz="950">
+                <a:solidFill>
+                  <a:srgbClr val="94A3B8"/>
+                </a:solidFill>
+                <a:latin typeface="Malgun Gothic"/>
+              </a:rPr>
+              <a:t>   ·  p.31</a:t>
+            </a:r>
+          </a:p>
+          <a:p>
+            <a:pPr>
+              <a:spcAft>
+                <a:spcPts val="1080"/>
+              </a:spcAft>
+            </a:pPr>
+            <a:r>
+              <a:rPr sz="1100" b="1">
+                <a:solidFill>
+                  <a:srgbClr val="4F46E5"/>
+                </a:solidFill>
+                <a:latin typeface="Malgun Gothic"/>
+              </a:rPr>
+              <a:t>29  </a:t>
+            </a:r>
+            <a:r>
+              <a:rPr sz="1100">
+                <a:solidFill>
+                  <a:srgbClr val="334155"/>
+                </a:solidFill>
+                <a:latin typeface="Malgun Gothic"/>
+              </a:rPr>
+              <a:t>자주 묻는 질문 (FAQ)</a:t>
+            </a:r>
+            <a:r>
+              <a:rPr sz="950">
+                <a:solidFill>
+                  <a:srgbClr val="94A3B8"/>
+                </a:solidFill>
+                <a:latin typeface="Malgun Gothic"/>
+              </a:rPr>
+              <a:t>   ·  p.32</a:t>
+            </a:r>
+          </a:p>
+          <a:p>
+            <a:pPr>
+              <a:spcAft>
+                <a:spcPts val="1080"/>
+              </a:spcAft>
+            </a:pPr>
+            <a:r>
+              <a:rPr sz="1100" b="1">
+                <a:solidFill>
+                  <a:srgbClr val="4F46E5"/>
+                </a:solidFill>
+                <a:latin typeface="Malgun Gothic"/>
+              </a:rPr>
+              <a:t>30  </a:t>
+            </a:r>
+            <a:r>
+              <a:rPr sz="1100">
+                <a:solidFill>
+                  <a:srgbClr val="334155"/>
+                </a:solidFill>
+                <a:latin typeface="Malgun Gothic"/>
+              </a:rPr>
+              <a:t>수업 진행 체크리스트</a:t>
+            </a:r>
+            <a:r>
+              <a:rPr sz="950">
+                <a:solidFill>
+                  <a:srgbClr val="94A3B8"/>
+                </a:solidFill>
+                <a:latin typeface="Malgun Gothic"/>
+              </a:rPr>
+              <a:t>   ·  p.33</a:t>
+            </a:r>
+          </a:p>
+          <a:p>
+            <a:pPr>
+              <a:spcAft>
+                <a:spcPts val="1080"/>
+              </a:spcAft>
+            </a:pPr>
+            <a:r>
+              <a:rPr sz="1100" b="1">
+                <a:solidFill>
+                  <a:srgbClr val="4F46E5"/>
+                </a:solidFill>
+                <a:latin typeface="Malgun Gothic"/>
+              </a:rPr>
+              <a:t>31  </a:t>
+            </a:r>
+            <a:r>
+              <a:rPr sz="1100">
+                <a:solidFill>
+                  <a:srgbClr val="334155"/>
+                </a:solidFill>
+                <a:latin typeface="Malgun Gothic"/>
+              </a:rPr>
+              <a:t>마무리 · 좋은 수업을 위한 실천 가이드</a:t>
+            </a:r>
+            <a:r>
+              <a:rPr sz="950">
+                <a:solidFill>
+                  <a:srgbClr val="94A3B8"/>
+                </a:solidFill>
+                <a:latin typeface="Malgun Gothic"/>
+              </a:rPr>
+              <a:t>   ·  p.34</a:t>
             </a:r>
           </a:p>
         </p:txBody>
